--- a/assets/figures-editable/c1-c2/c1-e25.pptx
+++ b/assets/figures-editable/c1-c2/c1-e25.pptx
@@ -7,7 +7,7 @@
   <p:sldIdLst>
     <p:sldId id="256" r:id="rId7"/>
   </p:sldIdLst>
-  <p:sldSz cx="11948160" cy="7924799" type="screen4x3"/>
+  <p:sldSz cx="12191695" cy="6858000" type="screen4x3"/>
   <p:notesSz cx="6858000" cy="9144000"/>
   <p:defaultTextStyle>
     <a:defPPr>
@@ -3098,14 +3098,14 @@
       <p:grpSpPr/>
       <p:sp>
         <p:nvSpPr>
-          <p:cNvPr id="2" name="text1" descr="sci-ppt:C1-E25-001"/>
+          <p:cNvPr id="2" name="C1-E25 text 0" descr="sci-ppt:o000"/>
           <p:cNvSpPr txBox="1"/>
           <p:nvPr/>
         </p:nvSpPr>
         <p:spPr>
           <a:xfrm>
-            <a:off x="316992" y="268224"/>
-            <a:ext cx="11277600" cy="359054"/>
+            <a:off x="274320" y="118872"/>
+            <a:ext cx="11612880" cy="340105"/>
           </a:xfrm>
           <a:prstGeom prst="rect">
             <a:avLst/>
@@ -3114,7 +3114,7 @@
           <a:effectLst/>
         </p:spPr>
         <p:txBody>
-          <a:bodyPr wrap="none" lIns="27432" rIns="27432" tIns="18288" bIns="18288" anchor="ctr">
+          <a:bodyPr wrap="none" lIns="18288" rIns="18288" tIns="18288" bIns="18288" anchor="t">
             <a:spAutoFit/>
           </a:bodyPr>
           <a:lstStyle/>
@@ -3125,59 +3125,67 @@
               </a:spcAft>
             </a:pPr>
             <a:r>
-              <a:rPr sz="1823" b="0" i="0">
+              <a:rPr sz="1900" b="1" i="0">
                 <a:solidFill>
                   <a:srgbClr val="8EDBD4"/>
                 </a:solidFill>
                 <a:latin typeface="Arial"/>
               </a:rPr>
-              <a:t>C1-E25 | Physical-variable diagram</a:t>
-            </a:r>
-          </a:p>
-        </p:txBody>
-      </p:sp>
-      <p:sp>
-        <p:nvSpPr>
-          <p:cNvPr id="3" name="rect2" descr="sci-ppt:C1-E25-002"/>
-          <p:cNvSpPr/>
+              <a:t>C1-E25 · Declared impulse calculation and applicability diagnostics</a:t>
+            </a:r>
+          </a:p>
+        </p:txBody>
+      </p:sp>
+      <p:sp>
+        <p:nvSpPr>
+          <p:cNvPr id="3" name="C1-E25 text 1" descr="sci-ppt:o001"/>
+          <p:cNvSpPr txBox="1"/>
           <p:nvPr/>
         </p:nvSpPr>
         <p:spPr>
           <a:xfrm>
-            <a:off x="1219200" y="2194560"/>
-            <a:ext cx="8290560" cy="1463040"/>
+            <a:off x="457200" y="914400"/>
+            <a:ext cx="11247120" cy="262636"/>
           </a:xfrm>
           <a:prstGeom prst="rect">
             <a:avLst/>
           </a:prstGeom>
-          <a:solidFill>
-            <a:srgbClr val="213E4B"/>
-          </a:solidFill>
-          <a:ln w="19050">
-            <a:solidFill>
-              <a:srgbClr val="B4C7D2"/>
-            </a:solidFill>
-          </a:ln>
+          <a:noFill/>
           <a:effectLst/>
         </p:spPr>
         <p:txBody>
-          <a:bodyPr rtlCol="0" anchor="ctr"/>
-          <a:lstStyle/>
-          <a:p>
-            <a:pPr algn="ctr"/>
+          <a:bodyPr wrap="none" lIns="18288" rIns="18288" tIns="18288" bIns="18288" anchor="t">
+            <a:spAutoFit/>
+          </a:bodyPr>
+          <a:lstStyle/>
+          <a:p>
+            <a:pPr algn="l">
+              <a:spcAft>
+                <a:spcPts val="0"/>
+              </a:spcAft>
+            </a:pPr>
+            <a:r>
+              <a:rPr sz="1400" b="1" i="0">
+                <a:solidFill>
+                  <a:srgbClr val="8EDBD4"/>
+                </a:solidFill>
+                <a:latin typeface="Arial"/>
+              </a:rPr>
+              <a:t>Time scales of the declared impulse case (log axis, µs)</a:t>
+            </a:r>
           </a:p>
         </p:txBody>
       </p:sp>
       <p:cxnSp>
         <p:nvCxnSpPr>
-          <p:cNvPr id="4" name="line3" descr="sci-ppt:C1-E25-003"/>
+          <p:cNvPr id="4" name="C1-E25 line 2" descr="sci-ppt:o002"/>
           <p:cNvCxnSpPr/>
           <p:nvPr/>
         </p:nvCxnSpPr>
         <p:spPr>
           <a:xfrm>
-            <a:off x="1219200" y="2194560"/>
-            <a:ext cx="8290560" cy="0"/>
+            <a:off x="914400" y="3108960"/>
+            <a:ext cx="10332720" cy="0"/>
           </a:xfrm>
           <a:prstGeom prst="line">
             <a:avLst/>
@@ -3192,19 +3200,19 @@
       </p:cxnSp>
       <p:cxnSp>
         <p:nvCxnSpPr>
-          <p:cNvPr id="5" name="line4" descr="sci-ppt:C1-E25-004"/>
+          <p:cNvPr id="5" name="C1-E25 line 3" descr="sci-ppt:o003"/>
           <p:cNvCxnSpPr/>
           <p:nvPr/>
         </p:nvCxnSpPr>
         <p:spPr>
           <a:xfrm>
-            <a:off x="1219200" y="3657600"/>
-            <a:ext cx="8290560" cy="0"/>
+            <a:off x="914400" y="3108960"/>
+            <a:ext cx="0" cy="73152"/>
           </a:xfrm>
           <a:prstGeom prst="line">
             <a:avLst/>
           </a:prstGeom>
-          <a:ln w="25400">
+          <a:ln w="15240">
             <a:solidFill>
               <a:srgbClr val="B4C7D2"/>
             </a:solidFill>
@@ -3212,40 +3220,16 @@
           <a:effectLst/>
         </p:spPr>
       </p:cxnSp>
-      <p:cxnSp>
-        <p:nvCxnSpPr>
-          <p:cNvPr id="6" name="arrow5" descr="sci-ppt:C1-E25-005"/>
-          <p:cNvCxnSpPr/>
-          <p:nvPr/>
-        </p:nvCxnSpPr>
-        <p:spPr>
-          <a:xfrm>
-            <a:off x="2316480" y="2926080"/>
-            <a:ext cx="5608319" cy="0"/>
-          </a:xfrm>
-          <a:prstGeom prst="line">
-            <a:avLst/>
-          </a:prstGeom>
-          <a:ln w="25400">
-            <a:solidFill>
-              <a:srgbClr val="8EDBD4"/>
-            </a:solidFill>
-            <a:headEnd type="none" w="med" len="med"/>
-            <a:tailEnd type="triangle" w="med" len="med"/>
-          </a:ln>
-          <a:effectLst/>
-        </p:spPr>
-      </p:cxnSp>
-      <p:sp>
-        <p:nvSpPr>
-          <p:cNvPr id="7" name="text6" descr="sci-ppt:C1-E25-006"/>
+      <p:sp>
+        <p:nvSpPr>
+          <p:cNvPr id="6" name="C1-E25 text 4" descr="sci-ppt:o004"/>
           <p:cNvSpPr txBox="1"/>
           <p:nvPr/>
         </p:nvSpPr>
         <p:spPr>
           <a:xfrm>
-            <a:off x="1402080" y="1463040"/>
-            <a:ext cx="3657600" cy="377952"/>
+            <a:off x="457200" y="3200400"/>
+            <a:ext cx="914400" cy="216153"/>
           </a:xfrm>
           <a:prstGeom prst="rect">
             <a:avLst/>
@@ -3254,7 +3238,921 @@
           <a:effectLst/>
         </p:spPr>
         <p:txBody>
-          <a:bodyPr wrap="none" lIns="27432" rIns="27432" tIns="18288" bIns="18288" anchor="ctr">
+          <a:bodyPr wrap="none" lIns="18288" rIns="18288" tIns="18288" bIns="18288" anchor="t">
+            <a:spAutoFit/>
+          </a:bodyPr>
+          <a:lstStyle/>
+          <a:p>
+            <a:pPr algn="ctr">
+              <a:spcAft>
+                <a:spcPts val="0"/>
+              </a:spcAft>
+            </a:pPr>
+            <a:r>
+              <a:rPr sz="1100" b="0" i="0">
+                <a:solidFill>
+                  <a:srgbClr val="B4C7D2"/>
+                </a:solidFill>
+                <a:latin typeface="Arial"/>
+              </a:rPr>
+              <a:t>10⁻²</a:t>
+            </a:r>
+          </a:p>
+        </p:txBody>
+      </p:sp>
+      <p:cxnSp>
+        <p:nvCxnSpPr>
+          <p:cNvPr id="7" name="C1-E25 line 5" descr="sci-ppt:o005"/>
+          <p:cNvCxnSpPr/>
+          <p:nvPr/>
+        </p:nvCxnSpPr>
+        <p:spPr>
+          <a:xfrm>
+            <a:off x="2390502" y="3108960"/>
+            <a:ext cx="0" cy="73152"/>
+          </a:xfrm>
+          <a:prstGeom prst="line">
+            <a:avLst/>
+          </a:prstGeom>
+          <a:ln w="15240">
+            <a:solidFill>
+              <a:srgbClr val="B4C7D2"/>
+            </a:solidFill>
+          </a:ln>
+          <a:effectLst/>
+        </p:spPr>
+      </p:cxnSp>
+      <p:sp>
+        <p:nvSpPr>
+          <p:cNvPr id="8" name="C1-E25 text 6" descr="sci-ppt:o006"/>
+          <p:cNvSpPr txBox="1"/>
+          <p:nvPr/>
+        </p:nvSpPr>
+        <p:spPr>
+          <a:xfrm>
+            <a:off x="1933302" y="3200400"/>
+            <a:ext cx="914400" cy="216153"/>
+          </a:xfrm>
+          <a:prstGeom prst="rect">
+            <a:avLst/>
+          </a:prstGeom>
+          <a:noFill/>
+          <a:effectLst/>
+        </p:spPr>
+        <p:txBody>
+          <a:bodyPr wrap="none" lIns="18288" rIns="18288" tIns="18288" bIns="18288" anchor="t">
+            <a:spAutoFit/>
+          </a:bodyPr>
+          <a:lstStyle/>
+          <a:p>
+            <a:pPr algn="ctr">
+              <a:spcAft>
+                <a:spcPts val="0"/>
+              </a:spcAft>
+            </a:pPr>
+            <a:r>
+              <a:rPr sz="1100" b="0" i="0">
+                <a:solidFill>
+                  <a:srgbClr val="B4C7D2"/>
+                </a:solidFill>
+                <a:latin typeface="Arial"/>
+              </a:rPr>
+              <a:t>10⁻¹</a:t>
+            </a:r>
+          </a:p>
+        </p:txBody>
+      </p:sp>
+      <p:cxnSp>
+        <p:nvCxnSpPr>
+          <p:cNvPr id="9" name="C1-E25 line 7" descr="sci-ppt:o007"/>
+          <p:cNvCxnSpPr/>
+          <p:nvPr/>
+        </p:nvCxnSpPr>
+        <p:spPr>
+          <a:xfrm>
+            <a:off x="3866605" y="3108960"/>
+            <a:ext cx="0" cy="73152"/>
+          </a:xfrm>
+          <a:prstGeom prst="line">
+            <a:avLst/>
+          </a:prstGeom>
+          <a:ln w="15240">
+            <a:solidFill>
+              <a:srgbClr val="B4C7D2"/>
+            </a:solidFill>
+          </a:ln>
+          <a:effectLst/>
+        </p:spPr>
+      </p:cxnSp>
+      <p:sp>
+        <p:nvSpPr>
+          <p:cNvPr id="10" name="C1-E25 text 8" descr="sci-ppt:o008"/>
+          <p:cNvSpPr txBox="1"/>
+          <p:nvPr/>
+        </p:nvSpPr>
+        <p:spPr>
+          <a:xfrm>
+            <a:off x="3409405" y="3200400"/>
+            <a:ext cx="914400" cy="216153"/>
+          </a:xfrm>
+          <a:prstGeom prst="rect">
+            <a:avLst/>
+          </a:prstGeom>
+          <a:noFill/>
+          <a:effectLst/>
+        </p:spPr>
+        <p:txBody>
+          <a:bodyPr wrap="none" lIns="18288" rIns="18288" tIns="18288" bIns="18288" anchor="t">
+            <a:spAutoFit/>
+          </a:bodyPr>
+          <a:lstStyle/>
+          <a:p>
+            <a:pPr algn="ctr">
+              <a:spcAft>
+                <a:spcPts val="0"/>
+              </a:spcAft>
+            </a:pPr>
+            <a:r>
+              <a:rPr sz="1100" b="0" i="0">
+                <a:solidFill>
+                  <a:srgbClr val="B4C7D2"/>
+                </a:solidFill>
+                <a:latin typeface="Arial"/>
+              </a:rPr>
+              <a:t>10⁰</a:t>
+            </a:r>
+          </a:p>
+        </p:txBody>
+      </p:sp>
+      <p:cxnSp>
+        <p:nvCxnSpPr>
+          <p:cNvPr id="11" name="C1-E25 line 9" descr="sci-ppt:o009"/>
+          <p:cNvCxnSpPr/>
+          <p:nvPr/>
+        </p:nvCxnSpPr>
+        <p:spPr>
+          <a:xfrm>
+            <a:off x="5342708" y="3108960"/>
+            <a:ext cx="0" cy="73152"/>
+          </a:xfrm>
+          <a:prstGeom prst="line">
+            <a:avLst/>
+          </a:prstGeom>
+          <a:ln w="15240">
+            <a:solidFill>
+              <a:srgbClr val="B4C7D2"/>
+            </a:solidFill>
+          </a:ln>
+          <a:effectLst/>
+        </p:spPr>
+      </p:cxnSp>
+      <p:sp>
+        <p:nvSpPr>
+          <p:cNvPr id="12" name="C1-E25 text 10" descr="sci-ppt:o010"/>
+          <p:cNvSpPr txBox="1"/>
+          <p:nvPr/>
+        </p:nvSpPr>
+        <p:spPr>
+          <a:xfrm>
+            <a:off x="4885508" y="3200400"/>
+            <a:ext cx="914400" cy="216153"/>
+          </a:xfrm>
+          <a:prstGeom prst="rect">
+            <a:avLst/>
+          </a:prstGeom>
+          <a:noFill/>
+          <a:effectLst/>
+        </p:spPr>
+        <p:txBody>
+          <a:bodyPr wrap="none" lIns="18288" rIns="18288" tIns="18288" bIns="18288" anchor="t">
+            <a:spAutoFit/>
+          </a:bodyPr>
+          <a:lstStyle/>
+          <a:p>
+            <a:pPr algn="ctr">
+              <a:spcAft>
+                <a:spcPts val="0"/>
+              </a:spcAft>
+            </a:pPr>
+            <a:r>
+              <a:rPr sz="1100" b="0" i="0">
+                <a:solidFill>
+                  <a:srgbClr val="B4C7D2"/>
+                </a:solidFill>
+                <a:latin typeface="Arial"/>
+              </a:rPr>
+              <a:t>10¹</a:t>
+            </a:r>
+          </a:p>
+        </p:txBody>
+      </p:sp>
+      <p:cxnSp>
+        <p:nvCxnSpPr>
+          <p:cNvPr id="13" name="C1-E25 line 11" descr="sci-ppt:o011"/>
+          <p:cNvCxnSpPr/>
+          <p:nvPr/>
+        </p:nvCxnSpPr>
+        <p:spPr>
+          <a:xfrm>
+            <a:off x="6818811" y="3108960"/>
+            <a:ext cx="0" cy="73152"/>
+          </a:xfrm>
+          <a:prstGeom prst="line">
+            <a:avLst/>
+          </a:prstGeom>
+          <a:ln w="15240">
+            <a:solidFill>
+              <a:srgbClr val="B4C7D2"/>
+            </a:solidFill>
+          </a:ln>
+          <a:effectLst/>
+        </p:spPr>
+      </p:cxnSp>
+      <p:sp>
+        <p:nvSpPr>
+          <p:cNvPr id="14" name="C1-E25 text 12" descr="sci-ppt:o012"/>
+          <p:cNvSpPr txBox="1"/>
+          <p:nvPr/>
+        </p:nvSpPr>
+        <p:spPr>
+          <a:xfrm>
+            <a:off x="6361611" y="3200400"/>
+            <a:ext cx="914400" cy="216153"/>
+          </a:xfrm>
+          <a:prstGeom prst="rect">
+            <a:avLst/>
+          </a:prstGeom>
+          <a:noFill/>
+          <a:effectLst/>
+        </p:spPr>
+        <p:txBody>
+          <a:bodyPr wrap="none" lIns="18288" rIns="18288" tIns="18288" bIns="18288" anchor="t">
+            <a:spAutoFit/>
+          </a:bodyPr>
+          <a:lstStyle/>
+          <a:p>
+            <a:pPr algn="ctr">
+              <a:spcAft>
+                <a:spcPts val="0"/>
+              </a:spcAft>
+            </a:pPr>
+            <a:r>
+              <a:rPr sz="1100" b="0" i="0">
+                <a:solidFill>
+                  <a:srgbClr val="B4C7D2"/>
+                </a:solidFill>
+                <a:latin typeface="Arial"/>
+              </a:rPr>
+              <a:t>10²</a:t>
+            </a:r>
+          </a:p>
+        </p:txBody>
+      </p:sp>
+      <p:cxnSp>
+        <p:nvCxnSpPr>
+          <p:cNvPr id="15" name="C1-E25 line 13" descr="sci-ppt:o013"/>
+          <p:cNvCxnSpPr/>
+          <p:nvPr/>
+        </p:nvCxnSpPr>
+        <p:spPr>
+          <a:xfrm>
+            <a:off x="8294914" y="3108960"/>
+            <a:ext cx="0" cy="73152"/>
+          </a:xfrm>
+          <a:prstGeom prst="line">
+            <a:avLst/>
+          </a:prstGeom>
+          <a:ln w="15240">
+            <a:solidFill>
+              <a:srgbClr val="B4C7D2"/>
+            </a:solidFill>
+          </a:ln>
+          <a:effectLst/>
+        </p:spPr>
+      </p:cxnSp>
+      <p:sp>
+        <p:nvSpPr>
+          <p:cNvPr id="16" name="C1-E25 text 14" descr="sci-ppt:o014"/>
+          <p:cNvSpPr txBox="1"/>
+          <p:nvPr/>
+        </p:nvSpPr>
+        <p:spPr>
+          <a:xfrm>
+            <a:off x="7837714" y="3200400"/>
+            <a:ext cx="914400" cy="216153"/>
+          </a:xfrm>
+          <a:prstGeom prst="rect">
+            <a:avLst/>
+          </a:prstGeom>
+          <a:noFill/>
+          <a:effectLst/>
+        </p:spPr>
+        <p:txBody>
+          <a:bodyPr wrap="none" lIns="18288" rIns="18288" tIns="18288" bIns="18288" anchor="t">
+            <a:spAutoFit/>
+          </a:bodyPr>
+          <a:lstStyle/>
+          <a:p>
+            <a:pPr algn="ctr">
+              <a:spcAft>
+                <a:spcPts val="0"/>
+              </a:spcAft>
+            </a:pPr>
+            <a:r>
+              <a:rPr sz="1100" b="0" i="0">
+                <a:solidFill>
+                  <a:srgbClr val="B4C7D2"/>
+                </a:solidFill>
+                <a:latin typeface="Arial"/>
+              </a:rPr>
+              <a:t>10³</a:t>
+            </a:r>
+          </a:p>
+        </p:txBody>
+      </p:sp>
+      <p:cxnSp>
+        <p:nvCxnSpPr>
+          <p:cNvPr id="17" name="C1-E25 line 15" descr="sci-ppt:o015"/>
+          <p:cNvCxnSpPr/>
+          <p:nvPr/>
+        </p:nvCxnSpPr>
+        <p:spPr>
+          <a:xfrm>
+            <a:off x="9771017" y="3108960"/>
+            <a:ext cx="0" cy="73152"/>
+          </a:xfrm>
+          <a:prstGeom prst="line">
+            <a:avLst/>
+          </a:prstGeom>
+          <a:ln w="15240">
+            <a:solidFill>
+              <a:srgbClr val="B4C7D2"/>
+            </a:solidFill>
+          </a:ln>
+          <a:effectLst/>
+        </p:spPr>
+      </p:cxnSp>
+      <p:sp>
+        <p:nvSpPr>
+          <p:cNvPr id="18" name="C1-E25 text 16" descr="sci-ppt:o016"/>
+          <p:cNvSpPr txBox="1"/>
+          <p:nvPr/>
+        </p:nvSpPr>
+        <p:spPr>
+          <a:xfrm>
+            <a:off x="9313817" y="3200400"/>
+            <a:ext cx="914400" cy="216153"/>
+          </a:xfrm>
+          <a:prstGeom prst="rect">
+            <a:avLst/>
+          </a:prstGeom>
+          <a:noFill/>
+          <a:effectLst/>
+        </p:spPr>
+        <p:txBody>
+          <a:bodyPr wrap="none" lIns="18288" rIns="18288" tIns="18288" bIns="18288" anchor="t">
+            <a:spAutoFit/>
+          </a:bodyPr>
+          <a:lstStyle/>
+          <a:p>
+            <a:pPr algn="ctr">
+              <a:spcAft>
+                <a:spcPts val="0"/>
+              </a:spcAft>
+            </a:pPr>
+            <a:r>
+              <a:rPr sz="1100" b="0" i="0">
+                <a:solidFill>
+                  <a:srgbClr val="B4C7D2"/>
+                </a:solidFill>
+                <a:latin typeface="Arial"/>
+              </a:rPr>
+              <a:t>10⁴</a:t>
+            </a:r>
+          </a:p>
+        </p:txBody>
+      </p:sp>
+      <p:cxnSp>
+        <p:nvCxnSpPr>
+          <p:cNvPr id="19" name="C1-E25 line 17" descr="sci-ppt:o017"/>
+          <p:cNvCxnSpPr/>
+          <p:nvPr/>
+        </p:nvCxnSpPr>
+        <p:spPr>
+          <a:xfrm>
+            <a:off x="11247120" y="3108960"/>
+            <a:ext cx="0" cy="73152"/>
+          </a:xfrm>
+          <a:prstGeom prst="line">
+            <a:avLst/>
+          </a:prstGeom>
+          <a:ln w="15240">
+            <a:solidFill>
+              <a:srgbClr val="B4C7D2"/>
+            </a:solidFill>
+          </a:ln>
+          <a:effectLst/>
+        </p:spPr>
+      </p:cxnSp>
+      <p:sp>
+        <p:nvSpPr>
+          <p:cNvPr id="20" name="C1-E25 text 18" descr="sci-ppt:o018"/>
+          <p:cNvSpPr txBox="1"/>
+          <p:nvPr/>
+        </p:nvSpPr>
+        <p:spPr>
+          <a:xfrm>
+            <a:off x="10789920" y="3200400"/>
+            <a:ext cx="914400" cy="216153"/>
+          </a:xfrm>
+          <a:prstGeom prst="rect">
+            <a:avLst/>
+          </a:prstGeom>
+          <a:noFill/>
+          <a:effectLst/>
+        </p:spPr>
+        <p:txBody>
+          <a:bodyPr wrap="none" lIns="18288" rIns="18288" tIns="18288" bIns="18288" anchor="t">
+            <a:spAutoFit/>
+          </a:bodyPr>
+          <a:lstStyle/>
+          <a:p>
+            <a:pPr algn="ctr">
+              <a:spcAft>
+                <a:spcPts val="0"/>
+              </a:spcAft>
+            </a:pPr>
+            <a:r>
+              <a:rPr sz="1100" b="0" i="0">
+                <a:solidFill>
+                  <a:srgbClr val="B4C7D2"/>
+                </a:solidFill>
+                <a:latin typeface="Arial"/>
+              </a:rPr>
+              <a:t>10⁵</a:t>
+            </a:r>
+          </a:p>
+        </p:txBody>
+      </p:sp>
+      <p:cxnSp>
+        <p:nvCxnSpPr>
+          <p:cNvPr id="21" name="C1-E25 line 19" descr="sci-ppt:o019"/>
+          <p:cNvCxnSpPr/>
+          <p:nvPr/>
+        </p:nvCxnSpPr>
+        <p:spPr>
+          <a:xfrm flipV="1">
+            <a:off x="2130894" y="2834640"/>
+            <a:ext cx="0" cy="274320"/>
+          </a:xfrm>
+          <a:prstGeom prst="line">
+            <a:avLst/>
+          </a:prstGeom>
+          <a:ln w="27940">
+            <a:solidFill>
+              <a:srgbClr val="7FC8F8"/>
+            </a:solidFill>
+          </a:ln>
+          <a:effectLst/>
+        </p:spPr>
+      </p:cxnSp>
+      <p:sp>
+        <p:nvSpPr>
+          <p:cNvPr id="22" name="C1-E25 ellipse 20" descr="sci-ppt:o020"/>
+          <p:cNvSpPr/>
+          <p:nvPr/>
+        </p:nvSpPr>
+        <p:spPr>
+          <a:xfrm>
+            <a:off x="2048598" y="3026664"/>
+            <a:ext cx="164592" cy="164592"/>
+          </a:xfrm>
+          <a:prstGeom prst="ellipse">
+            <a:avLst/>
+          </a:prstGeom>
+          <a:solidFill>
+            <a:srgbClr val="7FC8F8"/>
+          </a:solidFill>
+          <a:ln w="12700">
+            <a:solidFill>
+              <a:srgbClr val="7FC8F8"/>
+            </a:solidFill>
+          </a:ln>
+          <a:effectLst/>
+        </p:spPr>
+        <p:txBody>
+          <a:bodyPr rtlCol="0" anchor="ctr"/>
+          <a:lstStyle/>
+          <a:p>
+            <a:pPr algn="ctr"/>
+          </a:p>
+        </p:txBody>
+      </p:sp>
+      <p:sp>
+        <p:nvSpPr>
+          <p:cNvPr id="23" name="C1-E25 text 21" descr="sci-ppt:o021"/>
+          <p:cNvSpPr txBox="1"/>
+          <p:nvPr/>
+        </p:nvSpPr>
+        <p:spPr>
+          <a:xfrm>
+            <a:off x="1033614" y="2148840"/>
+            <a:ext cx="2194560" cy="417576"/>
+          </a:xfrm>
+          <a:prstGeom prst="rect">
+            <a:avLst/>
+          </a:prstGeom>
+          <a:noFill/>
+          <a:effectLst/>
+        </p:spPr>
+        <p:txBody>
+          <a:bodyPr wrap="none" lIns="18288" rIns="18288" tIns="18288" bIns="18288" anchor="t">
+            <a:spAutoFit/>
+          </a:bodyPr>
+          <a:lstStyle/>
+          <a:p>
+            <a:pPr algn="ctr">
+              <a:spcAft>
+                <a:spcPts val="0"/>
+              </a:spcAft>
+            </a:pPr>
+            <a:r>
+              <a:rPr sz="1200" b="1" i="0">
+                <a:solidFill>
+                  <a:srgbClr val="7FC8F8"/>
+                </a:solidFill>
+                <a:latin typeface="Arial"/>
+              </a:rPr>
+              <a:t>acoustic crossing</a:t>
+            </a:r>
+          </a:p>
+          <a:p>
+            <a:pPr algn="ctr">
+              <a:spcAft>
+                <a:spcPts val="0"/>
+              </a:spcAft>
+            </a:pPr>
+            <a:r>
+              <a:rPr sz="1200" b="1" i="0">
+                <a:solidFill>
+                  <a:srgbClr val="7FC8F8"/>
+                </a:solidFill>
+                <a:latin typeface="Arial"/>
+              </a:rPr>
+              <a:t>tₐ = L/c = 0.067 µs</a:t>
+            </a:r>
+          </a:p>
+        </p:txBody>
+      </p:sp>
+      <p:cxnSp>
+        <p:nvCxnSpPr>
+          <p:cNvPr id="24" name="C1-E25 line 22" descr="sci-ppt:o022"/>
+          <p:cNvCxnSpPr/>
+          <p:nvPr/>
+        </p:nvCxnSpPr>
+        <p:spPr>
+          <a:xfrm flipV="1">
+            <a:off x="3422254" y="2103120"/>
+            <a:ext cx="0" cy="1005840"/>
+          </a:xfrm>
+          <a:prstGeom prst="line">
+            <a:avLst/>
+          </a:prstGeom>
+          <a:ln w="27940">
+            <a:solidFill>
+              <a:srgbClr val="8EDBD4"/>
+            </a:solidFill>
+          </a:ln>
+          <a:effectLst/>
+        </p:spPr>
+      </p:cxnSp>
+      <p:sp>
+        <p:nvSpPr>
+          <p:cNvPr id="25" name="C1-E25 ellipse 23" descr="sci-ppt:o023"/>
+          <p:cNvSpPr/>
+          <p:nvPr/>
+        </p:nvSpPr>
+        <p:spPr>
+          <a:xfrm>
+            <a:off x="3339958" y="3026664"/>
+            <a:ext cx="164592" cy="164592"/>
+          </a:xfrm>
+          <a:prstGeom prst="ellipse">
+            <a:avLst/>
+          </a:prstGeom>
+          <a:solidFill>
+            <a:srgbClr val="8EDBD4"/>
+          </a:solidFill>
+          <a:ln w="12700">
+            <a:solidFill>
+              <a:srgbClr val="8EDBD4"/>
+            </a:solidFill>
+          </a:ln>
+          <a:effectLst/>
+        </p:spPr>
+        <p:txBody>
+          <a:bodyPr rtlCol="0" anchor="ctr"/>
+          <a:lstStyle/>
+          <a:p>
+            <a:pPr algn="ctr"/>
+          </a:p>
+        </p:txBody>
+      </p:sp>
+      <p:sp>
+        <p:nvSpPr>
+          <p:cNvPr id="26" name="C1-E25 text 24" descr="sci-ppt:o024"/>
+          <p:cNvSpPr txBox="1"/>
+          <p:nvPr/>
+        </p:nvSpPr>
+        <p:spPr>
+          <a:xfrm>
+            <a:off x="2324974" y="1417320"/>
+            <a:ext cx="2194560" cy="417576"/>
+          </a:xfrm>
+          <a:prstGeom prst="rect">
+            <a:avLst/>
+          </a:prstGeom>
+          <a:noFill/>
+          <a:effectLst/>
+        </p:spPr>
+        <p:txBody>
+          <a:bodyPr wrap="none" lIns="18288" rIns="18288" tIns="18288" bIns="18288" anchor="t">
+            <a:spAutoFit/>
+          </a:bodyPr>
+          <a:lstStyle/>
+          <a:p>
+            <a:pPr algn="ctr">
+              <a:spcAft>
+                <a:spcPts val="0"/>
+              </a:spcAft>
+            </a:pPr>
+            <a:r>
+              <a:rPr sz="1200" b="1" i="0">
+                <a:solidFill>
+                  <a:srgbClr val="8EDBD4"/>
+                </a:solidFill>
+                <a:latin typeface="Arial"/>
+              </a:rPr>
+              <a:t>pulse duration</a:t>
+            </a:r>
+          </a:p>
+          <a:p>
+            <a:pPr algn="ctr">
+              <a:spcAft>
+                <a:spcPts val="0"/>
+              </a:spcAft>
+            </a:pPr>
+            <a:r>
+              <a:rPr sz="1200" b="1" i="0">
+                <a:solidFill>
+                  <a:srgbClr val="8EDBD4"/>
+                </a:solidFill>
+                <a:latin typeface="Arial"/>
+              </a:rPr>
+              <a:t>τ = 0.5 µs</a:t>
+            </a:r>
+          </a:p>
+        </p:txBody>
+      </p:sp>
+      <p:cxnSp>
+        <p:nvCxnSpPr>
+          <p:cNvPr id="27" name="C1-E25 line 25" descr="sci-ppt:o025"/>
+          <p:cNvCxnSpPr/>
+          <p:nvPr/>
+        </p:nvCxnSpPr>
+        <p:spPr>
+          <a:xfrm flipV="1">
+            <a:off x="6113889" y="2834640"/>
+            <a:ext cx="0" cy="274320"/>
+          </a:xfrm>
+          <a:prstGeom prst="line">
+            <a:avLst/>
+          </a:prstGeom>
+          <a:ln w="27940">
+            <a:solidFill>
+              <a:srgbClr val="F2B880"/>
+            </a:solidFill>
+          </a:ln>
+          <a:effectLst/>
+        </p:spPr>
+      </p:cxnSp>
+      <p:sp>
+        <p:nvSpPr>
+          <p:cNvPr id="28" name="C1-E25 ellipse 26" descr="sci-ppt:o026"/>
+          <p:cNvSpPr/>
+          <p:nvPr/>
+        </p:nvSpPr>
+        <p:spPr>
+          <a:xfrm>
+            <a:off x="6031593" y="3026664"/>
+            <a:ext cx="164592" cy="164592"/>
+          </a:xfrm>
+          <a:prstGeom prst="ellipse">
+            <a:avLst/>
+          </a:prstGeom>
+          <a:solidFill>
+            <a:srgbClr val="F2B880"/>
+          </a:solidFill>
+          <a:ln w="12700">
+            <a:solidFill>
+              <a:srgbClr val="F2B880"/>
+            </a:solidFill>
+          </a:ln>
+          <a:effectLst/>
+        </p:spPr>
+        <p:txBody>
+          <a:bodyPr rtlCol="0" anchor="ctr"/>
+          <a:lstStyle/>
+          <a:p>
+            <a:pPr algn="ctr"/>
+          </a:p>
+        </p:txBody>
+      </p:sp>
+      <p:sp>
+        <p:nvSpPr>
+          <p:cNvPr id="29" name="C1-E25 text 27" descr="sci-ppt:o027"/>
+          <p:cNvSpPr txBox="1"/>
+          <p:nvPr/>
+        </p:nvSpPr>
+        <p:spPr>
+          <a:xfrm>
+            <a:off x="5016609" y="2148840"/>
+            <a:ext cx="2194560" cy="417576"/>
+          </a:xfrm>
+          <a:prstGeom prst="rect">
+            <a:avLst/>
+          </a:prstGeom>
+          <a:noFill/>
+          <a:effectLst/>
+        </p:spPr>
+        <p:txBody>
+          <a:bodyPr wrap="none" lIns="18288" rIns="18288" tIns="18288" bIns="18288" anchor="t">
+            <a:spAutoFit/>
+          </a:bodyPr>
+          <a:lstStyle/>
+          <a:p>
+            <a:pPr algn="ctr">
+              <a:spcAft>
+                <a:spcPts val="0"/>
+              </a:spcAft>
+            </a:pPr>
+            <a:r>
+              <a:rPr sz="1200" b="1" i="0">
+                <a:solidFill>
+                  <a:srgbClr val="F2B880"/>
+                </a:solidFill>
+                <a:latin typeface="Arial"/>
+              </a:rPr>
+              <a:t>convective time</a:t>
+            </a:r>
+          </a:p>
+          <a:p>
+            <a:pPr algn="ctr">
+              <a:spcAft>
+                <a:spcPts val="0"/>
+              </a:spcAft>
+            </a:pPr>
+            <a:r>
+              <a:rPr sz="1200" b="1" i="0">
+                <a:solidFill>
+                  <a:srgbClr val="F2B880"/>
+                </a:solidFill>
+                <a:latin typeface="Arial"/>
+              </a:rPr>
+              <a:t>L/U = 33 µs</a:t>
+            </a:r>
+          </a:p>
+        </p:txBody>
+      </p:sp>
+      <p:cxnSp>
+        <p:nvCxnSpPr>
+          <p:cNvPr id="30" name="C1-E25 line 28" descr="sci-ppt:o028"/>
+          <p:cNvCxnSpPr/>
+          <p:nvPr/>
+        </p:nvCxnSpPr>
+        <p:spPr>
+          <a:xfrm flipV="1">
+            <a:off x="9771017" y="2103120"/>
+            <a:ext cx="0" cy="1005840"/>
+          </a:xfrm>
+          <a:prstGeom prst="line">
+            <a:avLst/>
+          </a:prstGeom>
+          <a:ln w="27940">
+            <a:solidFill>
+              <a:srgbClr val="F28BA0"/>
+            </a:solidFill>
+          </a:ln>
+          <a:effectLst/>
+        </p:spPr>
+      </p:cxnSp>
+      <p:sp>
+        <p:nvSpPr>
+          <p:cNvPr id="31" name="C1-E25 ellipse 29" descr="sci-ppt:o029"/>
+          <p:cNvSpPr/>
+          <p:nvPr/>
+        </p:nvSpPr>
+        <p:spPr>
+          <a:xfrm>
+            <a:off x="9688721" y="3026664"/>
+            <a:ext cx="164592" cy="164592"/>
+          </a:xfrm>
+          <a:prstGeom prst="ellipse">
+            <a:avLst/>
+          </a:prstGeom>
+          <a:solidFill>
+            <a:srgbClr val="F28BA0"/>
+          </a:solidFill>
+          <a:ln w="12700">
+            <a:solidFill>
+              <a:srgbClr val="F28BA0"/>
+            </a:solidFill>
+          </a:ln>
+          <a:effectLst/>
+        </p:spPr>
+        <p:txBody>
+          <a:bodyPr rtlCol="0" anchor="ctr"/>
+          <a:lstStyle/>
+          <a:p>
+            <a:pPr algn="ctr"/>
+          </a:p>
+        </p:txBody>
+      </p:sp>
+      <p:sp>
+        <p:nvSpPr>
+          <p:cNvPr id="32" name="C1-E25 text 30" descr="sci-ppt:o030"/>
+          <p:cNvSpPr txBox="1"/>
+          <p:nvPr/>
+        </p:nvSpPr>
+        <p:spPr>
+          <a:xfrm>
+            <a:off x="8673737" y="1417320"/>
+            <a:ext cx="2194560" cy="417576"/>
+          </a:xfrm>
+          <a:prstGeom prst="rect">
+            <a:avLst/>
+          </a:prstGeom>
+          <a:noFill/>
+          <a:effectLst/>
+        </p:spPr>
+        <p:txBody>
+          <a:bodyPr wrap="none" lIns="18288" rIns="18288" tIns="18288" bIns="18288" anchor="t">
+            <a:spAutoFit/>
+          </a:bodyPr>
+          <a:lstStyle/>
+          <a:p>
+            <a:pPr algn="ctr">
+              <a:spcAft>
+                <a:spcPts val="0"/>
+              </a:spcAft>
+            </a:pPr>
+            <a:r>
+              <a:rPr sz="1200" b="1" i="0">
+                <a:solidFill>
+                  <a:srgbClr val="F28BA0"/>
+                </a:solidFill>
+                <a:latin typeface="Arial"/>
+              </a:rPr>
+              <a:t>viscous time</a:t>
+            </a:r>
+          </a:p>
+          <a:p>
+            <a:pPr algn="ctr">
+              <a:spcAft>
+                <a:spcPts val="0"/>
+              </a:spcAft>
+            </a:pPr>
+            <a:r>
+              <a:rPr sz="1200" b="1" i="0">
+                <a:solidFill>
+                  <a:srgbClr val="F28BA0"/>
+                </a:solidFill>
+                <a:latin typeface="Arial"/>
+              </a:rPr>
+              <a:t>L²/ν = 10 ms</a:t>
+            </a:r>
+          </a:p>
+        </p:txBody>
+      </p:sp>
+      <p:sp>
+        <p:nvSpPr>
+          <p:cNvPr id="33" name="C1-E25 text 31" descr="sci-ppt:o031"/>
+          <p:cNvSpPr txBox="1"/>
+          <p:nvPr/>
+        </p:nvSpPr>
+        <p:spPr>
+          <a:xfrm>
+            <a:off x="914400" y="3749039"/>
+            <a:ext cx="10332720" cy="254889"/>
+          </a:xfrm>
+          <a:prstGeom prst="rect">
+            <a:avLst/>
+          </a:prstGeom>
+          <a:noFill/>
+          <a:effectLst/>
+        </p:spPr>
+        <p:txBody>
+          <a:bodyPr wrap="none" lIns="18288" rIns="18288" tIns="18288" bIns="18288" anchor="t">
             <a:spAutoFit/>
           </a:bodyPr>
           <a:lstStyle/>
@@ -3265,27 +4163,59 @@
               </a:spcAft>
             </a:pPr>
             <a:r>
-              <a:rPr sz="1920" b="0" i="0">
-                <a:solidFill>
-                  <a:srgbClr val="E7F0F3"/>
+              <a:rPr sz="1350" b="1" i="0">
+                <a:solidFill>
+                  <a:srgbClr val="8EDBD4"/>
                 </a:solidFill>
                 <a:latin typeface="Arial"/>
               </a:rPr>
-              <a:t>Π0 at z = 0</a:t>
-            </a:r>
-          </a:p>
-        </p:txBody>
-      </p:sp>
-      <p:sp>
-        <p:nvSpPr>
-          <p:cNvPr id="8" name="text7" descr="sci-ppt:C1-E25-007"/>
+              <a:t>Ratios of the declared case</a:t>
+            </a:r>
+          </a:p>
+        </p:txBody>
+      </p:sp>
+      <p:sp>
+        <p:nvSpPr>
+          <p:cNvPr id="34" name="C1-E25 round_rect 32" descr="sci-ppt:o032"/>
+          <p:cNvSpPr/>
+          <p:nvPr/>
+        </p:nvSpPr>
+        <p:spPr>
+          <a:xfrm>
+            <a:off x="914400" y="4114800"/>
+            <a:ext cx="3291840" cy="1417320"/>
+          </a:xfrm>
+          <a:prstGeom prst="roundRect">
+            <a:avLst/>
+          </a:prstGeom>
+          <a:solidFill>
+            <a:srgbClr val="213E4B"/>
+          </a:solidFill>
+          <a:ln w="20320">
+            <a:solidFill>
+              <a:srgbClr val="F2B880"/>
+            </a:solidFill>
+          </a:ln>
+          <a:effectLst/>
+        </p:spPr>
+        <p:txBody>
+          <a:bodyPr rtlCol="0" anchor="ctr"/>
+          <a:lstStyle/>
+          <a:p>
+            <a:pPr algn="ctr"/>
+          </a:p>
+        </p:txBody>
+      </p:sp>
+      <p:sp>
+        <p:nvSpPr>
+          <p:cNvPr id="35" name="C1-E25 text 33" descr="sci-ppt:o033"/>
           <p:cNvSpPr txBox="1"/>
           <p:nvPr/>
         </p:nvSpPr>
         <p:spPr>
           <a:xfrm>
-            <a:off x="7315200" y="1463040"/>
-            <a:ext cx="4267200" cy="377952"/>
+            <a:off x="1005840" y="4187952"/>
+            <a:ext cx="3108960" cy="278130"/>
           </a:xfrm>
           <a:prstGeom prst="rect">
             <a:avLst/>
@@ -3294,7 +4224,343 @@
           <a:effectLst/>
         </p:spPr>
         <p:txBody>
-          <a:bodyPr wrap="none" lIns="27432" rIns="27432" tIns="18288" bIns="18288" anchor="ctr">
+          <a:bodyPr wrap="none" lIns="18288" rIns="18288" tIns="18288" bIns="18288" anchor="t">
+            <a:spAutoFit/>
+          </a:bodyPr>
+          <a:lstStyle/>
+          <a:p>
+            <a:pPr algn="ctr">
+              <a:spcAft>
+                <a:spcPts val="0"/>
+              </a:spcAft>
+            </a:pPr>
+            <a:r>
+              <a:rPr sz="1500" b="1" i="0">
+                <a:solidFill>
+                  <a:srgbClr val="F2B880"/>
+                </a:solidFill>
+                <a:latin typeface="Arial"/>
+              </a:rPr>
+              <a:t>Uτ/L = 0.015</a:t>
+            </a:r>
+          </a:p>
+        </p:txBody>
+      </p:sp>
+      <p:sp>
+        <p:nvSpPr>
+          <p:cNvPr id="36" name="C1-E25 text 34" descr="sci-ppt:o034"/>
+          <p:cNvSpPr txBox="1"/>
+          <p:nvPr/>
+        </p:nvSpPr>
+        <p:spPr>
+          <a:xfrm>
+            <a:off x="1005840" y="4617720"/>
+            <a:ext cx="3108960" cy="231648"/>
+          </a:xfrm>
+          <a:prstGeom prst="rect">
+            <a:avLst/>
+          </a:prstGeom>
+          <a:noFill/>
+          <a:effectLst/>
+        </p:spPr>
+        <p:txBody>
+          <a:bodyPr wrap="none" lIns="18288" rIns="18288" tIns="18288" bIns="18288" anchor="t">
+            <a:spAutoFit/>
+          </a:bodyPr>
+          <a:lstStyle/>
+          <a:p>
+            <a:pPr algn="ctr">
+              <a:spcAft>
+                <a:spcPts val="0"/>
+              </a:spcAft>
+            </a:pPr>
+            <a:r>
+              <a:rPr sz="1200" b="0" i="0">
+                <a:solidFill>
+                  <a:srgbClr val="E7F0F3"/>
+                </a:solidFill>
+                <a:latin typeface="Arial"/>
+              </a:rPr>
+              <a:t>τ ≪ convective time ✓</a:t>
+            </a:r>
+          </a:p>
+        </p:txBody>
+      </p:sp>
+      <p:sp>
+        <p:nvSpPr>
+          <p:cNvPr id="37" name="C1-E25 round_rect 35" descr="sci-ppt:o035"/>
+          <p:cNvSpPr/>
+          <p:nvPr/>
+        </p:nvSpPr>
+        <p:spPr>
+          <a:xfrm>
+            <a:off x="4434840" y="4114800"/>
+            <a:ext cx="3291840" cy="1417320"/>
+          </a:xfrm>
+          <a:prstGeom prst="roundRect">
+            <a:avLst/>
+          </a:prstGeom>
+          <a:solidFill>
+            <a:srgbClr val="213E4B"/>
+          </a:solidFill>
+          <a:ln w="20320">
+            <a:solidFill>
+              <a:srgbClr val="F28BA0"/>
+            </a:solidFill>
+          </a:ln>
+          <a:effectLst/>
+        </p:spPr>
+        <p:txBody>
+          <a:bodyPr rtlCol="0" anchor="ctr"/>
+          <a:lstStyle/>
+          <a:p>
+            <a:pPr algn="ctr"/>
+          </a:p>
+        </p:txBody>
+      </p:sp>
+      <p:sp>
+        <p:nvSpPr>
+          <p:cNvPr id="38" name="C1-E25 text 36" descr="sci-ppt:o036"/>
+          <p:cNvSpPr txBox="1"/>
+          <p:nvPr/>
+        </p:nvSpPr>
+        <p:spPr>
+          <a:xfrm>
+            <a:off x="4526279" y="4187952"/>
+            <a:ext cx="3108960" cy="278130"/>
+          </a:xfrm>
+          <a:prstGeom prst="rect">
+            <a:avLst/>
+          </a:prstGeom>
+          <a:noFill/>
+          <a:effectLst/>
+        </p:spPr>
+        <p:txBody>
+          <a:bodyPr wrap="none" lIns="18288" rIns="18288" tIns="18288" bIns="18288" anchor="t">
+            <a:spAutoFit/>
+          </a:bodyPr>
+          <a:lstStyle/>
+          <a:p>
+            <a:pPr algn="ctr">
+              <a:spcAft>
+                <a:spcPts val="0"/>
+              </a:spcAft>
+            </a:pPr>
+            <a:r>
+              <a:rPr sz="1500" b="1" i="0">
+                <a:solidFill>
+                  <a:srgbClr val="F28BA0"/>
+                </a:solidFill>
+                <a:latin typeface="Arial"/>
+              </a:rPr>
+              <a:t>ντ/L² = 5×10⁻⁵</a:t>
+            </a:r>
+          </a:p>
+        </p:txBody>
+      </p:sp>
+      <p:sp>
+        <p:nvSpPr>
+          <p:cNvPr id="39" name="C1-E25 text 37" descr="sci-ppt:o037"/>
+          <p:cNvSpPr txBox="1"/>
+          <p:nvPr/>
+        </p:nvSpPr>
+        <p:spPr>
+          <a:xfrm>
+            <a:off x="4526279" y="4617720"/>
+            <a:ext cx="3108960" cy="231648"/>
+          </a:xfrm>
+          <a:prstGeom prst="rect">
+            <a:avLst/>
+          </a:prstGeom>
+          <a:noFill/>
+          <a:effectLst/>
+        </p:spPr>
+        <p:txBody>
+          <a:bodyPr wrap="none" lIns="18288" rIns="18288" tIns="18288" bIns="18288" anchor="t">
+            <a:spAutoFit/>
+          </a:bodyPr>
+          <a:lstStyle/>
+          <a:p>
+            <a:pPr algn="ctr">
+              <a:spcAft>
+                <a:spcPts val="0"/>
+              </a:spcAft>
+            </a:pPr>
+            <a:r>
+              <a:rPr sz="1200" b="0" i="0">
+                <a:solidFill>
+                  <a:srgbClr val="E7F0F3"/>
+                </a:solidFill>
+                <a:latin typeface="Arial"/>
+              </a:rPr>
+              <a:t>τ ≪ viscous time ✓</a:t>
+            </a:r>
+          </a:p>
+        </p:txBody>
+      </p:sp>
+      <p:sp>
+        <p:nvSpPr>
+          <p:cNvPr id="40" name="C1-E25 round_rect 38" descr="sci-ppt:o038"/>
+          <p:cNvSpPr/>
+          <p:nvPr/>
+        </p:nvSpPr>
+        <p:spPr>
+          <a:xfrm>
+            <a:off x="7955279" y="4114800"/>
+            <a:ext cx="3291840" cy="1417320"/>
+          </a:xfrm>
+          <a:prstGeom prst="roundRect">
+            <a:avLst/>
+          </a:prstGeom>
+          <a:solidFill>
+            <a:srgbClr val="213E4B"/>
+          </a:solidFill>
+          <a:ln w="20320">
+            <a:solidFill>
+              <a:srgbClr val="7FC8F8"/>
+            </a:solidFill>
+          </a:ln>
+          <a:effectLst/>
+        </p:spPr>
+        <p:txBody>
+          <a:bodyPr rtlCol="0" anchor="ctr"/>
+          <a:lstStyle/>
+          <a:p>
+            <a:pPr algn="ctr"/>
+          </a:p>
+        </p:txBody>
+      </p:sp>
+      <p:sp>
+        <p:nvSpPr>
+          <p:cNvPr id="41" name="C1-E25 text 39" descr="sci-ppt:o039"/>
+          <p:cNvSpPr txBox="1"/>
+          <p:nvPr/>
+        </p:nvSpPr>
+        <p:spPr>
+          <a:xfrm>
+            <a:off x="8046719" y="4187952"/>
+            <a:ext cx="3108960" cy="278130"/>
+          </a:xfrm>
+          <a:prstGeom prst="rect">
+            <a:avLst/>
+          </a:prstGeom>
+          <a:noFill/>
+          <a:effectLst/>
+        </p:spPr>
+        <p:txBody>
+          <a:bodyPr wrap="none" lIns="18288" rIns="18288" tIns="18288" bIns="18288" anchor="t">
+            <a:spAutoFit/>
+          </a:bodyPr>
+          <a:lstStyle/>
+          <a:p>
+            <a:pPr algn="ctr">
+              <a:spcAft>
+                <a:spcPts val="0"/>
+              </a:spcAft>
+            </a:pPr>
+            <a:r>
+              <a:rPr sz="1500" b="1" i="0">
+                <a:solidFill>
+                  <a:srgbClr val="7FC8F8"/>
+                </a:solidFill>
+                <a:latin typeface="Arial"/>
+              </a:rPr>
+              <a:t>τ / tₐ = 7.5</a:t>
+            </a:r>
+          </a:p>
+        </p:txBody>
+      </p:sp>
+      <p:sp>
+        <p:nvSpPr>
+          <p:cNvPr id="42" name="C1-E25 text 40" descr="sci-ppt:o040"/>
+          <p:cNvSpPr txBox="1"/>
+          <p:nvPr/>
+        </p:nvSpPr>
+        <p:spPr>
+          <a:xfrm>
+            <a:off x="8046719" y="4617720"/>
+            <a:ext cx="3108960" cy="603504"/>
+          </a:xfrm>
+          <a:prstGeom prst="rect">
+            <a:avLst/>
+          </a:prstGeom>
+          <a:noFill/>
+          <a:effectLst/>
+        </p:spPr>
+        <p:txBody>
+          <a:bodyPr wrap="none" lIns="18288" rIns="18288" tIns="18288" bIns="18288" anchor="t">
+            <a:spAutoFit/>
+          </a:bodyPr>
+          <a:lstStyle/>
+          <a:p>
+            <a:pPr algn="ctr">
+              <a:spcAft>
+                <a:spcPts val="0"/>
+              </a:spcAft>
+            </a:pPr>
+            <a:r>
+              <a:rPr sz="1200" b="0" i="0">
+                <a:solidFill>
+                  <a:srgbClr val="E7F0F3"/>
+                </a:solidFill>
+                <a:latin typeface="Arial"/>
+              </a:rPr>
+              <a:t>τ is longer than the acoustic</a:t>
+            </a:r>
+          </a:p>
+          <a:p>
+            <a:pPr algn="ctr">
+              <a:spcAft>
+                <a:spcPts val="0"/>
+              </a:spcAft>
+            </a:pPr>
+            <a:r>
+              <a:rPr sz="1200" b="0" i="0">
+                <a:solidFill>
+                  <a:srgbClr val="E7F0F3"/>
+                </a:solidFill>
+                <a:latin typeface="Arial"/>
+              </a:rPr>
+              <a:t>crossing, so pressure equalises along</a:t>
+            </a:r>
+          </a:p>
+          <a:p>
+            <a:pPr algn="ctr">
+              <a:spcAft>
+                <a:spcPts val="0"/>
+              </a:spcAft>
+            </a:pPr>
+            <a:r>
+              <a:rPr sz="1200" b="0" i="0">
+                <a:solidFill>
+                  <a:srgbClr val="E7F0F3"/>
+                </a:solidFill>
+                <a:latin typeface="Arial"/>
+              </a:rPr>
+              <a:t>the column</a:t>
+            </a:r>
+          </a:p>
+        </p:txBody>
+      </p:sp>
+      <p:sp>
+        <p:nvSpPr>
+          <p:cNvPr id="43" name="C1-E25 text 41" descr="sci-ppt:o041"/>
+          <p:cNvSpPr txBox="1"/>
+          <p:nvPr/>
+        </p:nvSpPr>
+        <p:spPr>
+          <a:xfrm>
+            <a:off x="457200" y="5806440"/>
+            <a:ext cx="11247120" cy="433070"/>
+          </a:xfrm>
+          <a:prstGeom prst="rect">
+            <a:avLst/>
+          </a:prstGeom>
+          <a:noFill/>
+          <a:effectLst/>
+        </p:spPr>
+        <p:txBody>
+          <a:bodyPr wrap="none" lIns="18288" rIns="18288" tIns="18288" bIns="18288" anchor="t">
             <a:spAutoFit/>
           </a:bodyPr>
           <a:lstStyle/>
@@ -3305,27 +4571,43 @@
               </a:spcAft>
             </a:pPr>
             <a:r>
-              <a:rPr sz="1920" b="0" i="0">
+              <a:rPr sz="1250" b="0" i="0">
                 <a:solidFill>
                   <a:srgbClr val="E7F0F3"/>
                 </a:solidFill>
                 <a:latin typeface="Arial"/>
               </a:rPr>
-              <a:t>Π = 0 at z = L</a:t>
-            </a:r>
-          </a:p>
-        </p:txBody>
-      </p:sp>
-      <p:sp>
-        <p:nvSpPr>
-          <p:cNvPr id="9" name="text8" descr="sci-ppt:C1-E25-008"/>
+              <a:t>Pressure impulse (Pa·s) and acoustic time (s) are different quantities: one measures the load delivered, the other how fast pressure</a:t>
+            </a:r>
+          </a:p>
+          <a:p>
+            <a:pPr algn="l">
+              <a:spcAft>
+                <a:spcPts val="0"/>
+              </a:spcAft>
+            </a:pPr>
+            <a:r>
+              <a:rPr sz="1250" b="0" i="0">
+                <a:solidFill>
+                  <a:srgbClr val="E7F0F3"/>
+                </a:solidFill>
+                <a:latin typeface="Arial"/>
+              </a:rPr>
+              <a:t>communicates.</a:t>
+            </a:r>
+          </a:p>
+        </p:txBody>
+      </p:sp>
+      <p:sp>
+        <p:nvSpPr>
+          <p:cNvPr id="44" name="C1-E25 text 42" descr="sci-ppt:o042"/>
           <p:cNvSpPr txBox="1"/>
           <p:nvPr/>
         </p:nvSpPr>
         <p:spPr>
           <a:xfrm>
-            <a:off x="3108960" y="2987040"/>
-            <a:ext cx="4876800" cy="359054"/>
+            <a:off x="320040" y="6510528"/>
+            <a:ext cx="11521440" cy="200660"/>
           </a:xfrm>
           <a:prstGeom prst="rect">
             <a:avLst/>
@@ -3334,7 +4616,7 @@
           <a:effectLst/>
         </p:spPr>
         <p:txBody>
-          <a:bodyPr wrap="none" lIns="27432" rIns="27432" tIns="18288" bIns="18288" anchor="ctr">
+          <a:bodyPr wrap="none" lIns="18288" rIns="18288" tIns="18288" bIns="18288" anchor="t">
             <a:spAutoFit/>
           </a:bodyPr>
           <a:lstStyle/>
@@ -3345,493 +4627,13 @@
               </a:spcAft>
             </a:pPr>
             <a:r>
-              <a:rPr sz="1823" b="0" i="0">
-                <a:solidFill>
-                  <a:srgbClr val="E7F0F3"/>
+              <a:rPr sz="1000" b="0" i="0">
+                <a:solidFill>
+                  <a:srgbClr val="B4C7D2"/>
                 </a:solidFill>
                 <a:latin typeface="Arial"/>
               </a:rPr>
-              <a:t>Δ u_z toward outlet</a:t>
-            </a:r>
-          </a:p>
-        </p:txBody>
-      </p:sp>
-      <p:sp>
-        <p:nvSpPr>
-          <p:cNvPr id="10" name="text9" descr="sci-ppt:C1-E25-009"/>
-          <p:cNvSpPr txBox="1"/>
-          <p:nvPr/>
-        </p:nvSpPr>
-        <p:spPr>
-          <a:xfrm>
-            <a:off x="2255520" y="4084320"/>
-            <a:ext cx="9022080" cy="359054"/>
-          </a:xfrm>
-          <a:prstGeom prst="rect">
-            <a:avLst/>
-          </a:prstGeom>
-          <a:noFill/>
-          <a:effectLst/>
-        </p:spPr>
-        <p:txBody>
-          <a:bodyPr wrap="none" lIns="27432" rIns="27432" tIns="18288" bIns="18288" anchor="ctr">
-            <a:spAutoFit/>
-          </a:bodyPr>
-          <a:lstStyle/>
-          <a:p>
-            <a:pPr algn="l">
-              <a:spcAft>
-                <a:spcPts val="0"/>
-              </a:spcAft>
-            </a:pPr>
-            <a:r>
-              <a:rPr sz="1823" b="0" i="0">
-                <a:solidFill>
-                  <a:srgbClr val="E7F0F3"/>
-                </a:solidFill>
-                <a:latin typeface="Arial"/>
-              </a:rPr>
-              <a:t>Pressure impulse gradient drives early acceleration.</a:t>
-            </a:r>
-          </a:p>
-        </p:txBody>
-      </p:sp>
-      <p:sp>
-        <p:nvSpPr>
-          <p:cNvPr id="11" name="text10" descr="sci-ppt:C1-E25-010"/>
-          <p:cNvSpPr txBox="1"/>
-          <p:nvPr/>
-        </p:nvSpPr>
-        <p:spPr>
-          <a:xfrm>
-            <a:off x="365760" y="4974336"/>
-            <a:ext cx="5547360" cy="321259"/>
-          </a:xfrm>
-          <a:prstGeom prst="rect">
-            <a:avLst/>
-          </a:prstGeom>
-          <a:noFill/>
-          <a:effectLst/>
-        </p:spPr>
-        <p:txBody>
-          <a:bodyPr wrap="none" lIns="27432" rIns="27432" tIns="18288" bIns="18288" anchor="ctr">
-            <a:spAutoFit/>
-          </a:bodyPr>
-          <a:lstStyle/>
-          <a:p>
-            <a:pPr algn="l">
-              <a:spcAft>
-                <a:spcPts val="0"/>
-              </a:spcAft>
-            </a:pPr>
-            <a:r>
-              <a:rPr sz="1632" b="0" i="0">
-                <a:solidFill>
-                  <a:srgbClr val="E7F0F3"/>
-                </a:solidFill>
-                <a:latin typeface="Arial"/>
-              </a:rPr>
-              <a:t>Δp = 0.60 MPa</a:t>
-            </a:r>
-          </a:p>
-        </p:txBody>
-      </p:sp>
-      <p:sp>
-        <p:nvSpPr>
-          <p:cNvPr id="12" name="text11" descr="sci-ppt:C1-E25-011"/>
-          <p:cNvSpPr txBox="1"/>
-          <p:nvPr/>
-        </p:nvSpPr>
-        <p:spPr>
-          <a:xfrm>
-            <a:off x="365760" y="5266944"/>
-            <a:ext cx="5547360" cy="321259"/>
-          </a:xfrm>
-          <a:prstGeom prst="rect">
-            <a:avLst/>
-          </a:prstGeom>
-          <a:noFill/>
-          <a:effectLst/>
-        </p:spPr>
-        <p:txBody>
-          <a:bodyPr wrap="none" lIns="27432" rIns="27432" tIns="18288" bIns="18288" anchor="ctr">
-            <a:spAutoFit/>
-          </a:bodyPr>
-          <a:lstStyle/>
-          <a:p>
-            <a:pPr algn="l">
-              <a:spcAft>
-                <a:spcPts val="0"/>
-              </a:spcAft>
-            </a:pPr>
-            <a:r>
-              <a:rPr sz="1632" b="0" i="0">
-                <a:solidFill>
-                  <a:srgbClr val="E7F0F3"/>
-                </a:solidFill>
-                <a:latin typeface="Arial"/>
-              </a:rPr>
-              <a:t>Π₀ = 0.30 Pa s</a:t>
-            </a:r>
-          </a:p>
-        </p:txBody>
-      </p:sp>
-      <p:sp>
-        <p:nvSpPr>
-          <p:cNvPr id="13" name="text12" descr="sci-ppt:C1-E25-012"/>
-          <p:cNvSpPr txBox="1"/>
-          <p:nvPr/>
-        </p:nvSpPr>
-        <p:spPr>
-          <a:xfrm>
-            <a:off x="365760" y="5559552"/>
-            <a:ext cx="5547360" cy="321259"/>
-          </a:xfrm>
-          <a:prstGeom prst="rect">
-            <a:avLst/>
-          </a:prstGeom>
-          <a:noFill/>
-          <a:effectLst/>
-        </p:spPr>
-        <p:txBody>
-          <a:bodyPr wrap="none" lIns="27432" rIns="27432" tIns="18288" bIns="18288" anchor="ctr">
-            <a:spAutoFit/>
-          </a:bodyPr>
-          <a:lstStyle/>
-          <a:p>
-            <a:pPr algn="l">
-              <a:spcAft>
-                <a:spcPts val="0"/>
-              </a:spcAft>
-            </a:pPr>
-            <a:r>
-              <a:rPr sz="1632" b="0" i="0">
-                <a:solidFill>
-                  <a:srgbClr val="E7F0F3"/>
-                </a:solidFill>
-                <a:latin typeface="Arial"/>
-              </a:rPr>
-              <a:t>L = 100 μm</a:t>
-            </a:r>
-          </a:p>
-        </p:txBody>
-      </p:sp>
-      <p:sp>
-        <p:nvSpPr>
-          <p:cNvPr id="14" name="text13" descr="sci-ppt:C1-E25-013"/>
-          <p:cNvSpPr txBox="1"/>
-          <p:nvPr/>
-        </p:nvSpPr>
-        <p:spPr>
-          <a:xfrm>
-            <a:off x="365760" y="5852160"/>
-            <a:ext cx="5547360" cy="321259"/>
-          </a:xfrm>
-          <a:prstGeom prst="rect">
-            <a:avLst/>
-          </a:prstGeom>
-          <a:noFill/>
-          <a:effectLst/>
-        </p:spPr>
-        <p:txBody>
-          <a:bodyPr wrap="none" lIns="27432" rIns="27432" tIns="18288" bIns="18288" anchor="ctr">
-            <a:spAutoFit/>
-          </a:bodyPr>
-          <a:lstStyle/>
-          <a:p>
-            <a:pPr algn="l">
-              <a:spcAft>
-                <a:spcPts val="0"/>
-              </a:spcAft>
-            </a:pPr>
-            <a:r>
-              <a:rPr sz="1632" b="0" i="0">
-                <a:solidFill>
-                  <a:srgbClr val="E7F0F3"/>
-                </a:solidFill>
-                <a:latin typeface="Arial"/>
-              </a:rPr>
-              <a:t>c</a:t>
-            </a:r>
-          </a:p>
-        </p:txBody>
-      </p:sp>
-      <p:sp>
-        <p:nvSpPr>
-          <p:cNvPr id="15" name="text14" descr="sci-ppt:C1-E25-014"/>
-          <p:cNvSpPr txBox="1"/>
-          <p:nvPr/>
-        </p:nvSpPr>
-        <p:spPr>
-          <a:xfrm>
-            <a:off x="365760" y="6144768"/>
-            <a:ext cx="5547360" cy="321259"/>
-          </a:xfrm>
-          <a:prstGeom prst="rect">
-            <a:avLst/>
-          </a:prstGeom>
-          <a:noFill/>
-          <a:effectLst/>
-        </p:spPr>
-        <p:txBody>
-          <a:bodyPr wrap="none" lIns="27432" rIns="27432" tIns="18288" bIns="18288" anchor="ctr">
-            <a:spAutoFit/>
-          </a:bodyPr>
-          <a:lstStyle/>
-          <a:p>
-            <a:pPr algn="l">
-              <a:spcAft>
-                <a:spcPts val="0"/>
-              </a:spcAft>
-            </a:pPr>
-            <a:r>
-              <a:rPr sz="1632" b="0" i="0">
-                <a:solidFill>
-                  <a:srgbClr val="E7F0F3"/>
-                </a:solidFill>
-                <a:latin typeface="Arial"/>
-              </a:rPr>
-              <a:t>ν</a:t>
-            </a:r>
-          </a:p>
-        </p:txBody>
-      </p:sp>
-      <p:sp>
-        <p:nvSpPr>
-          <p:cNvPr id="16" name="text15" descr="sci-ppt:C1-E25-015"/>
-          <p:cNvSpPr txBox="1"/>
-          <p:nvPr/>
-        </p:nvSpPr>
-        <p:spPr>
-          <a:xfrm>
-            <a:off x="6156960" y="4974336"/>
-            <a:ext cx="5547360" cy="321259"/>
-          </a:xfrm>
-          <a:prstGeom prst="rect">
-            <a:avLst/>
-          </a:prstGeom>
-          <a:noFill/>
-          <a:effectLst/>
-        </p:spPr>
-        <p:txBody>
-          <a:bodyPr wrap="none" lIns="27432" rIns="27432" tIns="18288" bIns="18288" anchor="ctr">
-            <a:spAutoFit/>
-          </a:bodyPr>
-          <a:lstStyle/>
-          <a:p>
-            <a:pPr algn="l">
-              <a:spcAft>
-                <a:spcPts val="0"/>
-              </a:spcAft>
-            </a:pPr>
-            <a:r>
-              <a:rPr sz="1632" b="0" i="0">
-                <a:solidFill>
-                  <a:srgbClr val="E7F0F3"/>
-                </a:solidFill>
-                <a:latin typeface="Arial"/>
-              </a:rPr>
-              <a:t>τ = 0.50 μs</a:t>
-            </a:r>
-          </a:p>
-        </p:txBody>
-      </p:sp>
-      <p:sp>
-        <p:nvSpPr>
-          <p:cNvPr id="17" name="text16" descr="sci-ppt:C1-E25-016"/>
-          <p:cNvSpPr txBox="1"/>
-          <p:nvPr/>
-        </p:nvSpPr>
-        <p:spPr>
-          <a:xfrm>
-            <a:off x="6156960" y="5266944"/>
-            <a:ext cx="5547360" cy="321259"/>
-          </a:xfrm>
-          <a:prstGeom prst="rect">
-            <a:avLst/>
-          </a:prstGeom>
-          <a:noFill/>
-          <a:effectLst/>
-        </p:spPr>
-        <p:txBody>
-          <a:bodyPr wrap="none" lIns="27432" rIns="27432" tIns="18288" bIns="18288" anchor="ctr">
-            <a:spAutoFit/>
-          </a:bodyPr>
-          <a:lstStyle/>
-          <a:p>
-            <a:pPr algn="l">
-              <a:spcAft>
-                <a:spcPts val="0"/>
-              </a:spcAft>
-            </a:pPr>
-            <a:r>
-              <a:rPr sz="1632" b="0" i="0">
-                <a:solidFill>
-                  <a:srgbClr val="E7F0F3"/>
-                </a:solidFill>
-                <a:latin typeface="Arial"/>
-              </a:rPr>
-              <a:t>ρ</a:t>
-            </a:r>
-          </a:p>
-        </p:txBody>
-      </p:sp>
-      <p:sp>
-        <p:nvSpPr>
-          <p:cNvPr id="18" name="text17" descr="sci-ppt:C1-E25-017"/>
-          <p:cNvSpPr txBox="1"/>
-          <p:nvPr/>
-        </p:nvSpPr>
-        <p:spPr>
-          <a:xfrm>
-            <a:off x="6156960" y="5559552"/>
-            <a:ext cx="5547360" cy="321259"/>
-          </a:xfrm>
-          <a:prstGeom prst="rect">
-            <a:avLst/>
-          </a:prstGeom>
-          <a:noFill/>
-          <a:effectLst/>
-        </p:spPr>
-        <p:txBody>
-          <a:bodyPr wrap="none" lIns="27432" rIns="27432" tIns="18288" bIns="18288" anchor="ctr">
-            <a:spAutoFit/>
-          </a:bodyPr>
-          <a:lstStyle/>
-          <a:p>
-            <a:pPr algn="l">
-              <a:spcAft>
-                <a:spcPts val="0"/>
-              </a:spcAft>
-            </a:pPr>
-            <a:r>
-              <a:rPr sz="1632" b="0" i="0">
-                <a:solidFill>
-                  <a:srgbClr val="E7F0F3"/>
-                </a:solidFill>
-                <a:latin typeface="Arial"/>
-              </a:rPr>
-              <a:t>U = 3.0 m/s</a:t>
-            </a:r>
-          </a:p>
-        </p:txBody>
-      </p:sp>
-      <p:sp>
-        <p:nvSpPr>
-          <p:cNvPr id="19" name="text18" descr="sci-ppt:C1-E25-018"/>
-          <p:cNvSpPr txBox="1"/>
-          <p:nvPr/>
-        </p:nvSpPr>
-        <p:spPr>
-          <a:xfrm>
-            <a:off x="6156960" y="5852160"/>
-            <a:ext cx="5547360" cy="321259"/>
-          </a:xfrm>
-          <a:prstGeom prst="rect">
-            <a:avLst/>
-          </a:prstGeom>
-          <a:noFill/>
-          <a:effectLst/>
-        </p:spPr>
-        <p:txBody>
-          <a:bodyPr wrap="none" lIns="27432" rIns="27432" tIns="18288" bIns="18288" anchor="ctr">
-            <a:spAutoFit/>
-          </a:bodyPr>
-          <a:lstStyle/>
-          <a:p>
-            <a:pPr algn="l">
-              <a:spcAft>
-                <a:spcPts val="0"/>
-              </a:spcAft>
-            </a:pPr>
-            <a:r>
-              <a:rPr sz="1632" b="0" i="0">
-                <a:solidFill>
-                  <a:srgbClr val="E7F0F3"/>
-                </a:solidFill>
-                <a:latin typeface="Arial"/>
-              </a:rPr>
-              <a:t>ta = L/c</a:t>
-            </a:r>
-          </a:p>
-        </p:txBody>
-      </p:sp>
-      <p:sp>
-        <p:nvSpPr>
-          <p:cNvPr id="20" name="text19" descr="sci-ppt:C1-E25-019"/>
-          <p:cNvSpPr txBox="1"/>
-          <p:nvPr/>
-        </p:nvSpPr>
-        <p:spPr>
-          <a:xfrm>
-            <a:off x="365760" y="6632448"/>
-            <a:ext cx="11277600" cy="302361"/>
-          </a:xfrm>
-          <a:prstGeom prst="rect">
-            <a:avLst/>
-          </a:prstGeom>
-          <a:noFill/>
-          <a:effectLst/>
-        </p:spPr>
-        <p:txBody>
-          <a:bodyPr wrap="none" lIns="27432" rIns="27432" tIns="18288" bIns="18288" anchor="ctr">
-            <a:spAutoFit/>
-          </a:bodyPr>
-          <a:lstStyle/>
-          <a:p>
-            <a:pPr algn="l">
-              <a:spcAft>
-                <a:spcPts val="0"/>
-              </a:spcAft>
-            </a:pPr>
-            <a:r>
-              <a:rPr sz="1536" b="0" i="0">
-                <a:solidFill>
-                  <a:srgbClr val="B4C7D2"/>
-                </a:solidFill>
-                <a:latin typeface="Arial"/>
-              </a:rPr>
-              <a:t>Small bulk residual scales support the ideal column approximation</a:t>
-            </a:r>
-          </a:p>
-        </p:txBody>
-      </p:sp>
-      <p:sp>
-        <p:nvSpPr>
-          <p:cNvPr id="21" name="text20" descr="sci-ppt:C1-E25-020"/>
-          <p:cNvSpPr txBox="1"/>
-          <p:nvPr/>
-        </p:nvSpPr>
-        <p:spPr>
-          <a:xfrm>
-            <a:off x="365760" y="6925056"/>
-            <a:ext cx="11277600" cy="302361"/>
-          </a:xfrm>
-          <a:prstGeom prst="rect">
-            <a:avLst/>
-          </a:prstGeom>
-          <a:noFill/>
-          <a:effectLst/>
-        </p:spPr>
-        <p:txBody>
-          <a:bodyPr wrap="none" lIns="27432" rIns="27432" tIns="18288" bIns="18288" anchor="ctr">
-            <a:spAutoFit/>
-          </a:bodyPr>
-          <a:lstStyle/>
-          <a:p>
-            <a:pPr algn="l">
-              <a:spcAft>
-                <a:spcPts val="0"/>
-              </a:spcAft>
-            </a:pPr>
-            <a:r>
-              <a:rPr sz="1536" b="0" i="0">
-                <a:solidFill>
-                  <a:srgbClr val="B4C7D2"/>
-                </a:solidFill>
-                <a:latin typeface="Arial"/>
-              </a:rPr>
-              <a:t>Many sound crossings are not a guarantee of correct pressure geometry</a:t>
+              <a:t>Π₀ = Δpτ = 0.60 MPa × 0.50 µs = 0.30 Pa·s; U = 3.0 m/s; c = 1500 m/s; L = 100 µm; ν = 10⁻⁶ m²/s.</a:t>
             </a:r>
           </a:p>
         </p:txBody>

--- a/assets/figures-editable/c1-c2/c1-e25.pptx
+++ b/assets/figures-editable/c1-c2/c1-e25.pptx
@@ -3131,21 +3131,1177 @@
                 </a:solidFill>
                 <a:latin typeface="Arial"/>
               </a:rPr>
-              <a:t>C1-E25 · Declared impulse calculation and applicability diagnostics</a:t>
-            </a:r>
-          </a:p>
-        </p:txBody>
-      </p:sp>
-      <p:sp>
-        <p:nvSpPr>
-          <p:cNvPr id="3" name="C1-E25 text 1" descr="sci-ppt:o001"/>
+              <a:t>C1-E25 · Geometry definition and exact symmetry identity</a:t>
+            </a:r>
+          </a:p>
+        </p:txBody>
+      </p:sp>
+      <p:sp>
+        <p:nvSpPr>
+          <p:cNvPr id="3" name="C1-E25 round_rect 1" descr="sci-ppt:o001"/>
+          <p:cNvSpPr/>
+          <p:nvPr/>
+        </p:nvSpPr>
+        <p:spPr>
+          <a:xfrm>
+            <a:off x="365760" y="914400"/>
+            <a:ext cx="4023360" cy="4937760"/>
+          </a:xfrm>
+          <a:prstGeom prst="roundRect">
+            <a:avLst/>
+          </a:prstGeom>
+          <a:solidFill>
+            <a:srgbClr val="213E4B"/>
+          </a:solidFill>
+          <a:ln w="20320">
+            <a:solidFill>
+              <a:srgbClr val="8EDBD4"/>
+            </a:solidFill>
+          </a:ln>
+          <a:effectLst/>
+        </p:spPr>
+        <p:txBody>
+          <a:bodyPr rtlCol="0" anchor="ctr"/>
+          <a:lstStyle/>
+          <a:p>
+            <a:pPr algn="ctr"/>
+          </a:p>
+        </p:txBody>
+      </p:sp>
+      <p:sp>
+        <p:nvSpPr>
+          <p:cNvPr id="4" name="C1-E25 text 2" descr="sci-ppt:o002"/>
           <p:cNvSpPr txBox="1"/>
           <p:nvPr/>
         </p:nvSpPr>
         <p:spPr>
           <a:xfrm>
-            <a:off x="457200" y="914400"/>
-            <a:ext cx="11247120" cy="262636"/>
+            <a:off x="475488" y="969264"/>
+            <a:ext cx="3803904" cy="254889"/>
+          </a:xfrm>
+          <a:prstGeom prst="rect">
+            <a:avLst/>
+          </a:prstGeom>
+          <a:noFill/>
+          <a:effectLst/>
+        </p:spPr>
+        <p:txBody>
+          <a:bodyPr wrap="none" lIns="18288" rIns="18288" tIns="18288" bIns="18288" anchor="t">
+            <a:spAutoFit/>
+          </a:bodyPr>
+          <a:lstStyle/>
+          <a:p>
+            <a:pPr algn="l">
+              <a:spcAft>
+                <a:spcPts val="0"/>
+              </a:spcAft>
+            </a:pPr>
+            <a:r>
+              <a:rPr sz="1350" b="1" i="0">
+                <a:solidFill>
+                  <a:srgbClr val="8EDBD4"/>
+                </a:solidFill>
+                <a:latin typeface="Arial"/>
+              </a:rPr>
+              <a:t>Perfect symmetry picks no direction</a:t>
+            </a:r>
+          </a:p>
+        </p:txBody>
+      </p:sp>
+      <p:sp>
+        <p:nvSpPr>
+          <p:cNvPr id="5" name="C1-E25 ellipse 3" descr="sci-ppt:o003"/>
+          <p:cNvSpPr/>
+          <p:nvPr/>
+        </p:nvSpPr>
+        <p:spPr>
+          <a:xfrm>
+            <a:off x="1554480" y="2560320"/>
+            <a:ext cx="1645920" cy="1645920"/>
+          </a:xfrm>
+          <a:prstGeom prst="ellipse">
+            <a:avLst/>
+          </a:prstGeom>
+          <a:solidFill>
+            <a:srgbClr val="0C1820"/>
+          </a:solidFill>
+          <a:ln w="27940">
+            <a:solidFill>
+              <a:srgbClr val="F2B880"/>
+            </a:solidFill>
+          </a:ln>
+          <a:effectLst/>
+        </p:spPr>
+        <p:txBody>
+          <a:bodyPr rtlCol="0" anchor="ctr"/>
+          <a:lstStyle/>
+          <a:p>
+            <a:pPr algn="ctr"/>
+          </a:p>
+        </p:txBody>
+      </p:sp>
+      <p:cxnSp>
+        <p:nvCxnSpPr>
+          <p:cNvPr id="6" name="C1-E25 arrow 4" descr="sci-ppt:o004"/>
+          <p:cNvCxnSpPr/>
+          <p:nvPr/>
+        </p:nvCxnSpPr>
+        <p:spPr>
+          <a:xfrm>
+            <a:off x="3246120" y="3383280"/>
+            <a:ext cx="548640" cy="0"/>
+          </a:xfrm>
+          <a:prstGeom prst="line">
+            <a:avLst/>
+          </a:prstGeom>
+          <a:ln w="30480">
+            <a:solidFill>
+              <a:srgbClr val="8EDBD4"/>
+            </a:solidFill>
+            <a:headEnd type="none" w="med" len="med"/>
+            <a:tailEnd type="triangle" w="med" len="med"/>
+          </a:ln>
+          <a:effectLst/>
+        </p:spPr>
+      </p:cxnSp>
+      <p:cxnSp>
+        <p:nvCxnSpPr>
+          <p:cNvPr id="7" name="C1-E25 arrow 5" descr="sci-ppt:o005"/>
+          <p:cNvCxnSpPr/>
+          <p:nvPr/>
+        </p:nvCxnSpPr>
+        <p:spPr>
+          <a:xfrm flipV="1">
+            <a:off x="3129738" y="2674620"/>
+            <a:ext cx="475137" cy="274320"/>
+          </a:xfrm>
+          <a:prstGeom prst="line">
+            <a:avLst/>
+          </a:prstGeom>
+          <a:ln w="30480">
+            <a:solidFill>
+              <a:srgbClr val="8EDBD4"/>
+            </a:solidFill>
+            <a:headEnd type="none" w="med" len="med"/>
+            <a:tailEnd type="triangle" w="med" len="med"/>
+          </a:ln>
+          <a:effectLst/>
+        </p:spPr>
+      </p:cxnSp>
+      <p:cxnSp>
+        <p:nvCxnSpPr>
+          <p:cNvPr id="8" name="C1-E25 arrow 6" descr="sci-ppt:o006"/>
+          <p:cNvCxnSpPr/>
+          <p:nvPr/>
+        </p:nvCxnSpPr>
+        <p:spPr>
+          <a:xfrm flipV="1">
+            <a:off x="2811780" y="2155844"/>
+            <a:ext cx="274320" cy="475137"/>
+          </a:xfrm>
+          <a:prstGeom prst="line">
+            <a:avLst/>
+          </a:prstGeom>
+          <a:ln w="30480">
+            <a:solidFill>
+              <a:srgbClr val="8EDBD4"/>
+            </a:solidFill>
+            <a:headEnd type="none" w="med" len="med"/>
+            <a:tailEnd type="triangle" w="med" len="med"/>
+          </a:ln>
+          <a:effectLst/>
+        </p:spPr>
+      </p:cxnSp>
+      <p:cxnSp>
+        <p:nvCxnSpPr>
+          <p:cNvPr id="9" name="C1-E25 arrow 7" descr="sci-ppt:o007"/>
+          <p:cNvCxnSpPr/>
+          <p:nvPr/>
+        </p:nvCxnSpPr>
+        <p:spPr>
+          <a:xfrm flipV="1">
+            <a:off x="2377440" y="1965960"/>
+            <a:ext cx="0" cy="548640"/>
+          </a:xfrm>
+          <a:prstGeom prst="line">
+            <a:avLst/>
+          </a:prstGeom>
+          <a:ln w="30480">
+            <a:solidFill>
+              <a:srgbClr val="8EDBD4"/>
+            </a:solidFill>
+            <a:headEnd type="none" w="med" len="med"/>
+            <a:tailEnd type="triangle" w="med" len="med"/>
+          </a:ln>
+          <a:effectLst/>
+        </p:spPr>
+      </p:cxnSp>
+      <p:cxnSp>
+        <p:nvCxnSpPr>
+          <p:cNvPr id="10" name="C1-E25 arrow 8" descr="sci-ppt:o008"/>
+          <p:cNvCxnSpPr/>
+          <p:nvPr/>
+        </p:nvCxnSpPr>
+        <p:spPr>
+          <a:xfrm flipH="1" flipV="1">
+            <a:off x="1668780" y="2155844"/>
+            <a:ext cx="274320" cy="475137"/>
+          </a:xfrm>
+          <a:prstGeom prst="line">
+            <a:avLst/>
+          </a:prstGeom>
+          <a:ln w="30480">
+            <a:solidFill>
+              <a:srgbClr val="8EDBD4"/>
+            </a:solidFill>
+            <a:headEnd type="none" w="med" len="med"/>
+            <a:tailEnd type="triangle" w="med" len="med"/>
+          </a:ln>
+          <a:effectLst/>
+        </p:spPr>
+      </p:cxnSp>
+      <p:cxnSp>
+        <p:nvCxnSpPr>
+          <p:cNvPr id="11" name="C1-E25 arrow 9" descr="sci-ppt:o009"/>
+          <p:cNvCxnSpPr/>
+          <p:nvPr/>
+        </p:nvCxnSpPr>
+        <p:spPr>
+          <a:xfrm flipH="1" flipV="1">
+            <a:off x="1150004" y="2674620"/>
+            <a:ext cx="475137" cy="274320"/>
+          </a:xfrm>
+          <a:prstGeom prst="line">
+            <a:avLst/>
+          </a:prstGeom>
+          <a:ln w="30480">
+            <a:solidFill>
+              <a:srgbClr val="8EDBD4"/>
+            </a:solidFill>
+            <a:headEnd type="none" w="med" len="med"/>
+            <a:tailEnd type="triangle" w="med" len="med"/>
+          </a:ln>
+          <a:effectLst/>
+        </p:spPr>
+      </p:cxnSp>
+      <p:cxnSp>
+        <p:nvCxnSpPr>
+          <p:cNvPr id="12" name="C1-E25 arrow 10" descr="sci-ppt:o010"/>
+          <p:cNvCxnSpPr/>
+          <p:nvPr/>
+        </p:nvCxnSpPr>
+        <p:spPr>
+          <a:xfrm flipH="1">
+            <a:off x="960120" y="3383280"/>
+            <a:ext cx="548640" cy="0"/>
+          </a:xfrm>
+          <a:prstGeom prst="line">
+            <a:avLst/>
+          </a:prstGeom>
+          <a:ln w="30480">
+            <a:solidFill>
+              <a:srgbClr val="8EDBD4"/>
+            </a:solidFill>
+            <a:headEnd type="none" w="med" len="med"/>
+            <a:tailEnd type="triangle" w="med" len="med"/>
+          </a:ln>
+          <a:effectLst/>
+        </p:spPr>
+      </p:cxnSp>
+      <p:cxnSp>
+        <p:nvCxnSpPr>
+          <p:cNvPr id="13" name="C1-E25 arrow 11" descr="sci-ppt:o011"/>
+          <p:cNvCxnSpPr/>
+          <p:nvPr/>
+        </p:nvCxnSpPr>
+        <p:spPr>
+          <a:xfrm flipH="1">
+            <a:off x="1150004" y="3817620"/>
+            <a:ext cx="475137" cy="274319"/>
+          </a:xfrm>
+          <a:prstGeom prst="line">
+            <a:avLst/>
+          </a:prstGeom>
+          <a:ln w="30480">
+            <a:solidFill>
+              <a:srgbClr val="8EDBD4"/>
+            </a:solidFill>
+            <a:headEnd type="none" w="med" len="med"/>
+            <a:tailEnd type="triangle" w="med" len="med"/>
+          </a:ln>
+          <a:effectLst/>
+        </p:spPr>
+      </p:cxnSp>
+      <p:cxnSp>
+        <p:nvCxnSpPr>
+          <p:cNvPr id="14" name="C1-E25 arrow 12" descr="sci-ppt:o012"/>
+          <p:cNvCxnSpPr/>
+          <p:nvPr/>
+        </p:nvCxnSpPr>
+        <p:spPr>
+          <a:xfrm flipH="1">
+            <a:off x="1668779" y="4135578"/>
+            <a:ext cx="274320" cy="475137"/>
+          </a:xfrm>
+          <a:prstGeom prst="line">
+            <a:avLst/>
+          </a:prstGeom>
+          <a:ln w="30480">
+            <a:solidFill>
+              <a:srgbClr val="8EDBD4"/>
+            </a:solidFill>
+            <a:headEnd type="none" w="med" len="med"/>
+            <a:tailEnd type="triangle" w="med" len="med"/>
+          </a:ln>
+          <a:effectLst/>
+        </p:spPr>
+      </p:cxnSp>
+      <p:cxnSp>
+        <p:nvCxnSpPr>
+          <p:cNvPr id="15" name="C1-E25 arrow 13" descr="sci-ppt:o013"/>
+          <p:cNvCxnSpPr/>
+          <p:nvPr/>
+        </p:nvCxnSpPr>
+        <p:spPr>
+          <a:xfrm flipH="1">
+            <a:off x="2377439" y="4251960"/>
+            <a:ext cx="1" cy="548640"/>
+          </a:xfrm>
+          <a:prstGeom prst="line">
+            <a:avLst/>
+          </a:prstGeom>
+          <a:ln w="30480">
+            <a:solidFill>
+              <a:srgbClr val="8EDBD4"/>
+            </a:solidFill>
+            <a:headEnd type="none" w="med" len="med"/>
+            <a:tailEnd type="triangle" w="med" len="med"/>
+          </a:ln>
+          <a:effectLst/>
+        </p:spPr>
+      </p:cxnSp>
+      <p:cxnSp>
+        <p:nvCxnSpPr>
+          <p:cNvPr id="16" name="C1-E25 arrow 14" descr="sci-ppt:o014"/>
+          <p:cNvCxnSpPr/>
+          <p:nvPr/>
+        </p:nvCxnSpPr>
+        <p:spPr>
+          <a:xfrm>
+            <a:off x="2811780" y="4135578"/>
+            <a:ext cx="274320" cy="475137"/>
+          </a:xfrm>
+          <a:prstGeom prst="line">
+            <a:avLst/>
+          </a:prstGeom>
+          <a:ln w="30480">
+            <a:solidFill>
+              <a:srgbClr val="8EDBD4"/>
+            </a:solidFill>
+            <a:headEnd type="none" w="med" len="med"/>
+            <a:tailEnd type="triangle" w="med" len="med"/>
+          </a:ln>
+          <a:effectLst/>
+        </p:spPr>
+      </p:cxnSp>
+      <p:cxnSp>
+        <p:nvCxnSpPr>
+          <p:cNvPr id="17" name="C1-E25 arrow 15" descr="sci-ppt:o015"/>
+          <p:cNvCxnSpPr/>
+          <p:nvPr/>
+        </p:nvCxnSpPr>
+        <p:spPr>
+          <a:xfrm>
+            <a:off x="3129738" y="3817620"/>
+            <a:ext cx="475137" cy="274320"/>
+          </a:xfrm>
+          <a:prstGeom prst="line">
+            <a:avLst/>
+          </a:prstGeom>
+          <a:ln w="30480">
+            <a:solidFill>
+              <a:srgbClr val="8EDBD4"/>
+            </a:solidFill>
+            <a:headEnd type="none" w="med" len="med"/>
+            <a:tailEnd type="triangle" w="med" len="med"/>
+          </a:ln>
+          <a:effectLst/>
+        </p:spPr>
+      </p:cxnSp>
+      <p:sp>
+        <p:nvSpPr>
+          <p:cNvPr id="18" name="C1-E25 text 16" descr="sci-ppt:o016"/>
+          <p:cNvSpPr txBox="1"/>
+          <p:nvPr/>
+        </p:nvSpPr>
+        <p:spPr>
+          <a:xfrm>
+            <a:off x="502920" y="5029200"/>
+            <a:ext cx="3749039" cy="626745"/>
+          </a:xfrm>
+          <a:prstGeom prst="rect">
+            <a:avLst/>
+          </a:prstGeom>
+          <a:noFill/>
+          <a:effectLst/>
+        </p:spPr>
+        <p:txBody>
+          <a:bodyPr wrap="none" lIns="18288" rIns="18288" tIns="18288" bIns="18288" anchor="t">
+            <a:spAutoFit/>
+          </a:bodyPr>
+          <a:lstStyle/>
+          <a:p>
+            <a:pPr algn="l">
+              <a:spcAft>
+                <a:spcPts val="0"/>
+              </a:spcAft>
+            </a:pPr>
+            <a:r>
+              <a:rPr sz="1250" b="0" i="0">
+                <a:solidFill>
+                  <a:srgbClr val="E7F0F3"/>
+                </a:solidFill>
+                <a:latin typeface="Arial"/>
+              </a:rPr>
+              <a:t>∮ eᵣ dΩ = 0: outward unit vectors cancel in</a:t>
+            </a:r>
+          </a:p>
+          <a:p>
+            <a:pPr algn="l">
+              <a:spcAft>
+                <a:spcPts val="0"/>
+              </a:spcAft>
+            </a:pPr>
+            <a:r>
+              <a:rPr sz="1250" b="0" i="0">
+                <a:solidFill>
+                  <a:srgbClr val="E7F0F3"/>
+                </a:solidFill>
+                <a:latin typeface="Arial"/>
+              </a:rPr>
+              <a:t>pairs, so a lone sphere has no preferred jet</a:t>
+            </a:r>
+          </a:p>
+          <a:p>
+            <a:pPr algn="l">
+              <a:spcAft>
+                <a:spcPts val="0"/>
+              </a:spcAft>
+            </a:pPr>
+            <a:r>
+              <a:rPr sz="1250" b="0" i="0">
+                <a:solidFill>
+                  <a:srgbClr val="E7F0F3"/>
+                </a:solidFill>
+                <a:latin typeface="Arial"/>
+              </a:rPr>
+              <a:t>direction.</a:t>
+            </a:r>
+          </a:p>
+        </p:txBody>
+      </p:sp>
+      <p:sp>
+        <p:nvSpPr>
+          <p:cNvPr id="19" name="C1-E25 rect 17" descr="sci-ppt:o017"/>
+          <p:cNvSpPr/>
+          <p:nvPr/>
+        </p:nvSpPr>
+        <p:spPr>
+          <a:xfrm>
+            <a:off x="4754880" y="5486400"/>
+            <a:ext cx="7040880" cy="256032"/>
+          </a:xfrm>
+          <a:prstGeom prst="rect">
+            <a:avLst/>
+          </a:prstGeom>
+          <a:solidFill>
+            <a:srgbClr val="3A5362"/>
+          </a:solidFill>
+          <a:ln w="16510">
+            <a:solidFill>
+              <a:srgbClr val="B4C7D2"/>
+            </a:solidFill>
+          </a:ln>
+          <a:effectLst/>
+        </p:spPr>
+        <p:txBody>
+          <a:bodyPr rtlCol="0" anchor="ctr"/>
+          <a:lstStyle/>
+          <a:p>
+            <a:pPr algn="ctr"/>
+          </a:p>
+        </p:txBody>
+      </p:sp>
+      <p:cxnSp>
+        <p:nvCxnSpPr>
+          <p:cNvPr id="20" name="C1-E25 line 18" descr="sci-ppt:o018"/>
+          <p:cNvCxnSpPr/>
+          <p:nvPr/>
+        </p:nvCxnSpPr>
+        <p:spPr>
+          <a:xfrm>
+            <a:off x="4846320" y="5742432"/>
+            <a:ext cx="137160" cy="155448"/>
+          </a:xfrm>
+          <a:prstGeom prst="line">
+            <a:avLst/>
+          </a:prstGeom>
+          <a:ln w="12700">
+            <a:solidFill>
+              <a:srgbClr val="B4C7D2"/>
+            </a:solidFill>
+          </a:ln>
+          <a:effectLst/>
+        </p:spPr>
+      </p:cxnSp>
+      <p:cxnSp>
+        <p:nvCxnSpPr>
+          <p:cNvPr id="21" name="C1-E25 line 19" descr="sci-ppt:o019"/>
+          <p:cNvCxnSpPr/>
+          <p:nvPr/>
+        </p:nvCxnSpPr>
+        <p:spPr>
+          <a:xfrm>
+            <a:off x="5074920" y="5742432"/>
+            <a:ext cx="137160" cy="155448"/>
+          </a:xfrm>
+          <a:prstGeom prst="line">
+            <a:avLst/>
+          </a:prstGeom>
+          <a:ln w="12700">
+            <a:solidFill>
+              <a:srgbClr val="B4C7D2"/>
+            </a:solidFill>
+          </a:ln>
+          <a:effectLst/>
+        </p:spPr>
+      </p:cxnSp>
+      <p:cxnSp>
+        <p:nvCxnSpPr>
+          <p:cNvPr id="22" name="C1-E25 line 20" descr="sci-ppt:o020"/>
+          <p:cNvCxnSpPr/>
+          <p:nvPr/>
+        </p:nvCxnSpPr>
+        <p:spPr>
+          <a:xfrm>
+            <a:off x="5303520" y="5742432"/>
+            <a:ext cx="137160" cy="155448"/>
+          </a:xfrm>
+          <a:prstGeom prst="line">
+            <a:avLst/>
+          </a:prstGeom>
+          <a:ln w="12700">
+            <a:solidFill>
+              <a:srgbClr val="B4C7D2"/>
+            </a:solidFill>
+          </a:ln>
+          <a:effectLst/>
+        </p:spPr>
+      </p:cxnSp>
+      <p:cxnSp>
+        <p:nvCxnSpPr>
+          <p:cNvPr id="23" name="C1-E25 line 21" descr="sci-ppt:o021"/>
+          <p:cNvCxnSpPr/>
+          <p:nvPr/>
+        </p:nvCxnSpPr>
+        <p:spPr>
+          <a:xfrm>
+            <a:off x="5532120" y="5742432"/>
+            <a:ext cx="137160" cy="155448"/>
+          </a:xfrm>
+          <a:prstGeom prst="line">
+            <a:avLst/>
+          </a:prstGeom>
+          <a:ln w="12700">
+            <a:solidFill>
+              <a:srgbClr val="B4C7D2"/>
+            </a:solidFill>
+          </a:ln>
+          <a:effectLst/>
+        </p:spPr>
+      </p:cxnSp>
+      <p:cxnSp>
+        <p:nvCxnSpPr>
+          <p:cNvPr id="24" name="C1-E25 line 22" descr="sci-ppt:o022"/>
+          <p:cNvCxnSpPr/>
+          <p:nvPr/>
+        </p:nvCxnSpPr>
+        <p:spPr>
+          <a:xfrm>
+            <a:off x="5760720" y="5742432"/>
+            <a:ext cx="137160" cy="155448"/>
+          </a:xfrm>
+          <a:prstGeom prst="line">
+            <a:avLst/>
+          </a:prstGeom>
+          <a:ln w="12700">
+            <a:solidFill>
+              <a:srgbClr val="B4C7D2"/>
+            </a:solidFill>
+          </a:ln>
+          <a:effectLst/>
+        </p:spPr>
+      </p:cxnSp>
+      <p:cxnSp>
+        <p:nvCxnSpPr>
+          <p:cNvPr id="25" name="C1-E25 line 23" descr="sci-ppt:o023"/>
+          <p:cNvCxnSpPr/>
+          <p:nvPr/>
+        </p:nvCxnSpPr>
+        <p:spPr>
+          <a:xfrm>
+            <a:off x="5989320" y="5742432"/>
+            <a:ext cx="137160" cy="155448"/>
+          </a:xfrm>
+          <a:prstGeom prst="line">
+            <a:avLst/>
+          </a:prstGeom>
+          <a:ln w="12700">
+            <a:solidFill>
+              <a:srgbClr val="B4C7D2"/>
+            </a:solidFill>
+          </a:ln>
+          <a:effectLst/>
+        </p:spPr>
+      </p:cxnSp>
+      <p:cxnSp>
+        <p:nvCxnSpPr>
+          <p:cNvPr id="26" name="C1-E25 line 24" descr="sci-ppt:o024"/>
+          <p:cNvCxnSpPr/>
+          <p:nvPr/>
+        </p:nvCxnSpPr>
+        <p:spPr>
+          <a:xfrm>
+            <a:off x="6217920" y="5742432"/>
+            <a:ext cx="137160" cy="155448"/>
+          </a:xfrm>
+          <a:prstGeom prst="line">
+            <a:avLst/>
+          </a:prstGeom>
+          <a:ln w="12700">
+            <a:solidFill>
+              <a:srgbClr val="B4C7D2"/>
+            </a:solidFill>
+          </a:ln>
+          <a:effectLst/>
+        </p:spPr>
+      </p:cxnSp>
+      <p:cxnSp>
+        <p:nvCxnSpPr>
+          <p:cNvPr id="27" name="C1-E25 line 25" descr="sci-ppt:o025"/>
+          <p:cNvCxnSpPr/>
+          <p:nvPr/>
+        </p:nvCxnSpPr>
+        <p:spPr>
+          <a:xfrm>
+            <a:off x="6446520" y="5742432"/>
+            <a:ext cx="137160" cy="155448"/>
+          </a:xfrm>
+          <a:prstGeom prst="line">
+            <a:avLst/>
+          </a:prstGeom>
+          <a:ln w="12700">
+            <a:solidFill>
+              <a:srgbClr val="B4C7D2"/>
+            </a:solidFill>
+          </a:ln>
+          <a:effectLst/>
+        </p:spPr>
+      </p:cxnSp>
+      <p:cxnSp>
+        <p:nvCxnSpPr>
+          <p:cNvPr id="28" name="C1-E25 line 26" descr="sci-ppt:o026"/>
+          <p:cNvCxnSpPr/>
+          <p:nvPr/>
+        </p:nvCxnSpPr>
+        <p:spPr>
+          <a:xfrm>
+            <a:off x="6675120" y="5742432"/>
+            <a:ext cx="137160" cy="155448"/>
+          </a:xfrm>
+          <a:prstGeom prst="line">
+            <a:avLst/>
+          </a:prstGeom>
+          <a:ln w="12700">
+            <a:solidFill>
+              <a:srgbClr val="B4C7D2"/>
+            </a:solidFill>
+          </a:ln>
+          <a:effectLst/>
+        </p:spPr>
+      </p:cxnSp>
+      <p:cxnSp>
+        <p:nvCxnSpPr>
+          <p:cNvPr id="29" name="C1-E25 line 27" descr="sci-ppt:o027"/>
+          <p:cNvCxnSpPr/>
+          <p:nvPr/>
+        </p:nvCxnSpPr>
+        <p:spPr>
+          <a:xfrm>
+            <a:off x="6903720" y="5742432"/>
+            <a:ext cx="137160" cy="155448"/>
+          </a:xfrm>
+          <a:prstGeom prst="line">
+            <a:avLst/>
+          </a:prstGeom>
+          <a:ln w="12700">
+            <a:solidFill>
+              <a:srgbClr val="B4C7D2"/>
+            </a:solidFill>
+          </a:ln>
+          <a:effectLst/>
+        </p:spPr>
+      </p:cxnSp>
+      <p:cxnSp>
+        <p:nvCxnSpPr>
+          <p:cNvPr id="30" name="C1-E25 line 28" descr="sci-ppt:o028"/>
+          <p:cNvCxnSpPr/>
+          <p:nvPr/>
+        </p:nvCxnSpPr>
+        <p:spPr>
+          <a:xfrm>
+            <a:off x="7132320" y="5742432"/>
+            <a:ext cx="137160" cy="155448"/>
+          </a:xfrm>
+          <a:prstGeom prst="line">
+            <a:avLst/>
+          </a:prstGeom>
+          <a:ln w="12700">
+            <a:solidFill>
+              <a:srgbClr val="B4C7D2"/>
+            </a:solidFill>
+          </a:ln>
+          <a:effectLst/>
+        </p:spPr>
+      </p:cxnSp>
+      <p:cxnSp>
+        <p:nvCxnSpPr>
+          <p:cNvPr id="31" name="C1-E25 line 29" descr="sci-ppt:o029"/>
+          <p:cNvCxnSpPr/>
+          <p:nvPr/>
+        </p:nvCxnSpPr>
+        <p:spPr>
+          <a:xfrm>
+            <a:off x="7360920" y="5742432"/>
+            <a:ext cx="137159" cy="155448"/>
+          </a:xfrm>
+          <a:prstGeom prst="line">
+            <a:avLst/>
+          </a:prstGeom>
+          <a:ln w="12700">
+            <a:solidFill>
+              <a:srgbClr val="B4C7D2"/>
+            </a:solidFill>
+          </a:ln>
+          <a:effectLst/>
+        </p:spPr>
+      </p:cxnSp>
+      <p:cxnSp>
+        <p:nvCxnSpPr>
+          <p:cNvPr id="32" name="C1-E25 line 30" descr="sci-ppt:o030"/>
+          <p:cNvCxnSpPr/>
+          <p:nvPr/>
+        </p:nvCxnSpPr>
+        <p:spPr>
+          <a:xfrm>
+            <a:off x="7589520" y="5742432"/>
+            <a:ext cx="137159" cy="155448"/>
+          </a:xfrm>
+          <a:prstGeom prst="line">
+            <a:avLst/>
+          </a:prstGeom>
+          <a:ln w="12700">
+            <a:solidFill>
+              <a:srgbClr val="B4C7D2"/>
+            </a:solidFill>
+          </a:ln>
+          <a:effectLst/>
+        </p:spPr>
+      </p:cxnSp>
+      <p:cxnSp>
+        <p:nvCxnSpPr>
+          <p:cNvPr id="33" name="C1-E25 line 31" descr="sci-ppt:o031"/>
+          <p:cNvCxnSpPr/>
+          <p:nvPr/>
+        </p:nvCxnSpPr>
+        <p:spPr>
+          <a:xfrm>
+            <a:off x="7818120" y="5742432"/>
+            <a:ext cx="137159" cy="155448"/>
+          </a:xfrm>
+          <a:prstGeom prst="line">
+            <a:avLst/>
+          </a:prstGeom>
+          <a:ln w="12700">
+            <a:solidFill>
+              <a:srgbClr val="B4C7D2"/>
+            </a:solidFill>
+          </a:ln>
+          <a:effectLst/>
+        </p:spPr>
+      </p:cxnSp>
+      <p:cxnSp>
+        <p:nvCxnSpPr>
+          <p:cNvPr id="34" name="C1-E25 line 32" descr="sci-ppt:o032"/>
+          <p:cNvCxnSpPr/>
+          <p:nvPr/>
+        </p:nvCxnSpPr>
+        <p:spPr>
+          <a:xfrm>
+            <a:off x="8046720" y="5742432"/>
+            <a:ext cx="137159" cy="155448"/>
+          </a:xfrm>
+          <a:prstGeom prst="line">
+            <a:avLst/>
+          </a:prstGeom>
+          <a:ln w="12700">
+            <a:solidFill>
+              <a:srgbClr val="B4C7D2"/>
+            </a:solidFill>
+          </a:ln>
+          <a:effectLst/>
+        </p:spPr>
+      </p:cxnSp>
+      <p:cxnSp>
+        <p:nvCxnSpPr>
+          <p:cNvPr id="35" name="C1-E25 line 33" descr="sci-ppt:o033"/>
+          <p:cNvCxnSpPr/>
+          <p:nvPr/>
+        </p:nvCxnSpPr>
+        <p:spPr>
+          <a:xfrm>
+            <a:off x="8275320" y="5742432"/>
+            <a:ext cx="137160" cy="155448"/>
+          </a:xfrm>
+          <a:prstGeom prst="line">
+            <a:avLst/>
+          </a:prstGeom>
+          <a:ln w="12700">
+            <a:solidFill>
+              <a:srgbClr val="B4C7D2"/>
+            </a:solidFill>
+          </a:ln>
+          <a:effectLst/>
+        </p:spPr>
+      </p:cxnSp>
+      <p:cxnSp>
+        <p:nvCxnSpPr>
+          <p:cNvPr id="36" name="C1-E25 line 34" descr="sci-ppt:o034"/>
+          <p:cNvCxnSpPr/>
+          <p:nvPr/>
+        </p:nvCxnSpPr>
+        <p:spPr>
+          <a:xfrm>
+            <a:off x="8503920" y="5742432"/>
+            <a:ext cx="137160" cy="155448"/>
+          </a:xfrm>
+          <a:prstGeom prst="line">
+            <a:avLst/>
+          </a:prstGeom>
+          <a:ln w="12700">
+            <a:solidFill>
+              <a:srgbClr val="B4C7D2"/>
+            </a:solidFill>
+          </a:ln>
+          <a:effectLst/>
+        </p:spPr>
+      </p:cxnSp>
+      <p:cxnSp>
+        <p:nvCxnSpPr>
+          <p:cNvPr id="37" name="C1-E25 line 35" descr="sci-ppt:o035"/>
+          <p:cNvCxnSpPr/>
+          <p:nvPr/>
+        </p:nvCxnSpPr>
+        <p:spPr>
+          <a:xfrm>
+            <a:off x="8732520" y="5742432"/>
+            <a:ext cx="137160" cy="155448"/>
+          </a:xfrm>
+          <a:prstGeom prst="line">
+            <a:avLst/>
+          </a:prstGeom>
+          <a:ln w="12700">
+            <a:solidFill>
+              <a:srgbClr val="B4C7D2"/>
+            </a:solidFill>
+          </a:ln>
+          <a:effectLst/>
+        </p:spPr>
+      </p:cxnSp>
+      <p:cxnSp>
+        <p:nvCxnSpPr>
+          <p:cNvPr id="38" name="C1-E25 line 36" descr="sci-ppt:o036"/>
+          <p:cNvCxnSpPr/>
+          <p:nvPr/>
+        </p:nvCxnSpPr>
+        <p:spPr>
+          <a:xfrm>
+            <a:off x="8961120" y="5742432"/>
+            <a:ext cx="137160" cy="155448"/>
+          </a:xfrm>
+          <a:prstGeom prst="line">
+            <a:avLst/>
+          </a:prstGeom>
+          <a:ln w="12700">
+            <a:solidFill>
+              <a:srgbClr val="B4C7D2"/>
+            </a:solidFill>
+          </a:ln>
+          <a:effectLst/>
+        </p:spPr>
+      </p:cxnSp>
+      <p:cxnSp>
+        <p:nvCxnSpPr>
+          <p:cNvPr id="39" name="C1-E25 line 37" descr="sci-ppt:o037"/>
+          <p:cNvCxnSpPr/>
+          <p:nvPr/>
+        </p:nvCxnSpPr>
+        <p:spPr>
+          <a:xfrm>
+            <a:off x="9189720" y="5742432"/>
+            <a:ext cx="137160" cy="155448"/>
+          </a:xfrm>
+          <a:prstGeom prst="line">
+            <a:avLst/>
+          </a:prstGeom>
+          <a:ln w="12700">
+            <a:solidFill>
+              <a:srgbClr val="B4C7D2"/>
+            </a:solidFill>
+          </a:ln>
+          <a:effectLst/>
+        </p:spPr>
+      </p:cxnSp>
+      <p:cxnSp>
+        <p:nvCxnSpPr>
+          <p:cNvPr id="40" name="C1-E25 line 38" descr="sci-ppt:o038"/>
+          <p:cNvCxnSpPr/>
+          <p:nvPr/>
+        </p:nvCxnSpPr>
+        <p:spPr>
+          <a:xfrm>
+            <a:off x="9418320" y="5742432"/>
+            <a:ext cx="137160" cy="155448"/>
+          </a:xfrm>
+          <a:prstGeom prst="line">
+            <a:avLst/>
+          </a:prstGeom>
+          <a:ln w="12700">
+            <a:solidFill>
+              <a:srgbClr val="B4C7D2"/>
+            </a:solidFill>
+          </a:ln>
+          <a:effectLst/>
+        </p:spPr>
+      </p:cxnSp>
+      <p:cxnSp>
+        <p:nvCxnSpPr>
+          <p:cNvPr id="41" name="C1-E25 line 39" descr="sci-ppt:o039"/>
+          <p:cNvCxnSpPr/>
+          <p:nvPr/>
+        </p:nvCxnSpPr>
+        <p:spPr>
+          <a:xfrm>
+            <a:off x="9646920" y="5742432"/>
+            <a:ext cx="137160" cy="155448"/>
+          </a:xfrm>
+          <a:prstGeom prst="line">
+            <a:avLst/>
+          </a:prstGeom>
+          <a:ln w="12700">
+            <a:solidFill>
+              <a:srgbClr val="B4C7D2"/>
+            </a:solidFill>
+          </a:ln>
+          <a:effectLst/>
+        </p:spPr>
+      </p:cxnSp>
+      <p:cxnSp>
+        <p:nvCxnSpPr>
+          <p:cNvPr id="42" name="C1-E25 line 40" descr="sci-ppt:o040"/>
+          <p:cNvCxnSpPr/>
+          <p:nvPr/>
+        </p:nvCxnSpPr>
+        <p:spPr>
+          <a:xfrm>
+            <a:off x="9875520" y="5742432"/>
+            <a:ext cx="137160" cy="155448"/>
+          </a:xfrm>
+          <a:prstGeom prst="line">
+            <a:avLst/>
+          </a:prstGeom>
+          <a:ln w="12700">
+            <a:solidFill>
+              <a:srgbClr val="B4C7D2"/>
+            </a:solidFill>
+          </a:ln>
+          <a:effectLst/>
+        </p:spPr>
+      </p:cxnSp>
+      <p:cxnSp>
+        <p:nvCxnSpPr>
+          <p:cNvPr id="43" name="C1-E25 line 41" descr="sci-ppt:o041"/>
+          <p:cNvCxnSpPr/>
+          <p:nvPr/>
+        </p:nvCxnSpPr>
+        <p:spPr>
+          <a:xfrm>
+            <a:off x="10104120" y="5742432"/>
+            <a:ext cx="137160" cy="155448"/>
+          </a:xfrm>
+          <a:prstGeom prst="line">
+            <a:avLst/>
+          </a:prstGeom>
+          <a:ln w="12700">
+            <a:solidFill>
+              <a:srgbClr val="B4C7D2"/>
+            </a:solidFill>
+          </a:ln>
+          <a:effectLst/>
+        </p:spPr>
+      </p:cxnSp>
+      <p:cxnSp>
+        <p:nvCxnSpPr>
+          <p:cNvPr id="44" name="C1-E25 line 42" descr="sci-ppt:o042"/>
+          <p:cNvCxnSpPr/>
+          <p:nvPr/>
+        </p:nvCxnSpPr>
+        <p:spPr>
+          <a:xfrm>
+            <a:off x="10332720" y="5742432"/>
+            <a:ext cx="137160" cy="155448"/>
+          </a:xfrm>
+          <a:prstGeom prst="line">
+            <a:avLst/>
+          </a:prstGeom>
+          <a:ln w="12700">
+            <a:solidFill>
+              <a:srgbClr val="B4C7D2"/>
+            </a:solidFill>
+          </a:ln>
+          <a:effectLst/>
+        </p:spPr>
+      </p:cxnSp>
+      <p:cxnSp>
+        <p:nvCxnSpPr>
+          <p:cNvPr id="45" name="C1-E25 line 43" descr="sci-ppt:o043"/>
+          <p:cNvCxnSpPr/>
+          <p:nvPr/>
+        </p:nvCxnSpPr>
+        <p:spPr>
+          <a:xfrm>
+            <a:off x="10561320" y="5742432"/>
+            <a:ext cx="137160" cy="155448"/>
+          </a:xfrm>
+          <a:prstGeom prst="line">
+            <a:avLst/>
+          </a:prstGeom>
+          <a:ln w="12700">
+            <a:solidFill>
+              <a:srgbClr val="B4C7D2"/>
+            </a:solidFill>
+          </a:ln>
+          <a:effectLst/>
+        </p:spPr>
+      </p:cxnSp>
+      <p:cxnSp>
+        <p:nvCxnSpPr>
+          <p:cNvPr id="46" name="C1-E25 line 44" descr="sci-ppt:o044"/>
+          <p:cNvCxnSpPr/>
+          <p:nvPr/>
+        </p:nvCxnSpPr>
+        <p:spPr>
+          <a:xfrm>
+            <a:off x="10789920" y="5742432"/>
+            <a:ext cx="137160" cy="155448"/>
+          </a:xfrm>
+          <a:prstGeom prst="line">
+            <a:avLst/>
+          </a:prstGeom>
+          <a:ln w="12700">
+            <a:solidFill>
+              <a:srgbClr val="B4C7D2"/>
+            </a:solidFill>
+          </a:ln>
+          <a:effectLst/>
+        </p:spPr>
+      </p:cxnSp>
+      <p:cxnSp>
+        <p:nvCxnSpPr>
+          <p:cNvPr id="47" name="C1-E25 line 45" descr="sci-ppt:o045"/>
+          <p:cNvCxnSpPr/>
+          <p:nvPr/>
+        </p:nvCxnSpPr>
+        <p:spPr>
+          <a:xfrm>
+            <a:off x="11018520" y="5742432"/>
+            <a:ext cx="137160" cy="155448"/>
+          </a:xfrm>
+          <a:prstGeom prst="line">
+            <a:avLst/>
+          </a:prstGeom>
+          <a:ln w="12700">
+            <a:solidFill>
+              <a:srgbClr val="B4C7D2"/>
+            </a:solidFill>
+          </a:ln>
+          <a:effectLst/>
+        </p:spPr>
+      </p:cxnSp>
+      <p:cxnSp>
+        <p:nvCxnSpPr>
+          <p:cNvPr id="48" name="C1-E25 line 46" descr="sci-ppt:o046"/>
+          <p:cNvCxnSpPr/>
+          <p:nvPr/>
+        </p:nvCxnSpPr>
+        <p:spPr>
+          <a:xfrm>
+            <a:off x="11247120" y="5742432"/>
+            <a:ext cx="137160" cy="155448"/>
+          </a:xfrm>
+          <a:prstGeom prst="line">
+            <a:avLst/>
+          </a:prstGeom>
+          <a:ln w="12700">
+            <a:solidFill>
+              <a:srgbClr val="B4C7D2"/>
+            </a:solidFill>
+          </a:ln>
+          <a:effectLst/>
+        </p:spPr>
+      </p:cxnSp>
+      <p:cxnSp>
+        <p:nvCxnSpPr>
+          <p:cNvPr id="49" name="C1-E25 line 47" descr="sci-ppt:o047"/>
+          <p:cNvCxnSpPr/>
+          <p:nvPr/>
+        </p:nvCxnSpPr>
+        <p:spPr>
+          <a:xfrm>
+            <a:off x="11475720" y="5742432"/>
+            <a:ext cx="137160" cy="155448"/>
+          </a:xfrm>
+          <a:prstGeom prst="line">
+            <a:avLst/>
+          </a:prstGeom>
+          <a:ln w="12700">
+            <a:solidFill>
+              <a:srgbClr val="B4C7D2"/>
+            </a:solidFill>
+          </a:ln>
+          <a:effectLst/>
+        </p:spPr>
+      </p:cxnSp>
+      <p:sp>
+        <p:nvSpPr>
+          <p:cNvPr id="50" name="C1-E25 text 48" descr="sci-ppt:o048"/>
+          <p:cNvSpPr txBox="1"/>
+          <p:nvPr/>
+        </p:nvSpPr>
+        <p:spPr>
+          <a:xfrm>
+            <a:off x="4754880" y="914400"/>
+            <a:ext cx="7040880" cy="262636"/>
           </a:xfrm>
           <a:prstGeom prst="rect">
             <a:avLst/>
@@ -3171,48 +4327,81 @@
                 </a:solidFill>
                 <a:latin typeface="Arial"/>
               </a:rPr>
-              <a:t>Time scales of the declared impulse case (log axis, µs)</a:t>
-            </a:r>
+              <a:t>Stand-off γ = h / Rₘₐₓ locates the boundary</a:t>
+            </a:r>
+          </a:p>
+        </p:txBody>
+      </p:sp>
+      <p:sp>
+        <p:nvSpPr>
+          <p:cNvPr id="51" name="C1-E25 ellipse 49" descr="sci-ppt:o049"/>
+          <p:cNvSpPr/>
+          <p:nvPr/>
+        </p:nvSpPr>
+        <p:spPr>
+          <a:xfrm>
+            <a:off x="5257800" y="4123944"/>
+            <a:ext cx="1188720" cy="1188720"/>
+          </a:xfrm>
+          <a:prstGeom prst="ellipse">
+            <a:avLst/>
+          </a:prstGeom>
+          <a:solidFill>
+            <a:srgbClr val="0C1820"/>
+          </a:solidFill>
+          <a:ln w="25400">
+            <a:solidFill>
+              <a:srgbClr val="F2B880"/>
+            </a:solidFill>
+          </a:ln>
+          <a:effectLst/>
+        </p:spPr>
+        <p:txBody>
+          <a:bodyPr rtlCol="0" anchor="ctr"/>
+          <a:lstStyle/>
+          <a:p>
+            <a:pPr algn="ctr"/>
           </a:p>
         </p:txBody>
       </p:sp>
       <p:cxnSp>
         <p:nvCxnSpPr>
-          <p:cNvPr id="4" name="C1-E25 line 2" descr="sci-ppt:o002"/>
+          <p:cNvPr id="52" name="C1-E25 line 50" descr="sci-ppt:o050"/>
           <p:cNvCxnSpPr/>
           <p:nvPr/>
         </p:nvCxnSpPr>
         <p:spPr>
           <a:xfrm>
-            <a:off x="914400" y="3108960"/>
-            <a:ext cx="10332720" cy="0"/>
+            <a:off x="5852160" y="4718304"/>
+            <a:ext cx="0" cy="768096"/>
           </a:xfrm>
           <a:prstGeom prst="line">
             <a:avLst/>
           </a:prstGeom>
-          <a:ln w="25400">
+          <a:ln w="15240">
             <a:solidFill>
               <a:srgbClr val="B4C7D2"/>
             </a:solidFill>
+            <a:prstDash val="dash"/>
           </a:ln>
           <a:effectLst/>
         </p:spPr>
       </p:cxnSp>
       <p:cxnSp>
         <p:nvCxnSpPr>
-          <p:cNvPr id="5" name="C1-E25 line 3" descr="sci-ppt:o003"/>
+          <p:cNvPr id="53" name="C1-E25 line 51" descr="sci-ppt:o051"/>
           <p:cNvCxnSpPr/>
           <p:nvPr/>
         </p:nvCxnSpPr>
         <p:spPr>
           <a:xfrm>
-            <a:off x="914400" y="3108960"/>
-            <a:ext cx="0" cy="73152"/>
+            <a:off x="6583680" y="4718304"/>
+            <a:ext cx="0" cy="768096"/>
           </a:xfrm>
           <a:prstGeom prst="line">
             <a:avLst/>
           </a:prstGeom>
-          <a:ln w="15240">
+          <a:ln w="16510">
             <a:solidFill>
               <a:srgbClr val="B4C7D2"/>
             </a:solidFill>
@@ -3220,16 +4409,60 @@
           <a:effectLst/>
         </p:spPr>
       </p:cxnSp>
-      <p:sp>
-        <p:nvSpPr>
-          <p:cNvPr id="6" name="C1-E25 text 4" descr="sci-ppt:o004"/>
+      <p:cxnSp>
+        <p:nvCxnSpPr>
+          <p:cNvPr id="54" name="C1-E25 line 52" descr="sci-ppt:o052"/>
+          <p:cNvCxnSpPr/>
+          <p:nvPr/>
+        </p:nvCxnSpPr>
+        <p:spPr>
+          <a:xfrm flipH="1">
+            <a:off x="6519672" y="4718304"/>
+            <a:ext cx="128016" cy="0"/>
+          </a:xfrm>
+          <a:prstGeom prst="line">
+            <a:avLst/>
+          </a:prstGeom>
+          <a:ln w="16510">
+            <a:solidFill>
+              <a:srgbClr val="B4C7D2"/>
+            </a:solidFill>
+          </a:ln>
+          <a:effectLst/>
+        </p:spPr>
+      </p:cxnSp>
+      <p:cxnSp>
+        <p:nvCxnSpPr>
+          <p:cNvPr id="55" name="C1-E25 line 53" descr="sci-ppt:o053"/>
+          <p:cNvCxnSpPr/>
+          <p:nvPr/>
+        </p:nvCxnSpPr>
+        <p:spPr>
+          <a:xfrm flipH="1">
+            <a:off x="6519672" y="5486400"/>
+            <a:ext cx="128016" cy="0"/>
+          </a:xfrm>
+          <a:prstGeom prst="line">
+            <a:avLst/>
+          </a:prstGeom>
+          <a:ln w="16510">
+            <a:solidFill>
+              <a:srgbClr val="B4C7D2"/>
+            </a:solidFill>
+          </a:ln>
+          <a:effectLst/>
+        </p:spPr>
+      </p:cxnSp>
+      <p:sp>
+        <p:nvSpPr>
+          <p:cNvPr id="56" name="C1-E25 text 54" descr="sci-ppt:o054"/>
           <p:cNvSpPr txBox="1"/>
           <p:nvPr/>
         </p:nvSpPr>
         <p:spPr>
           <a:xfrm>
-            <a:off x="457200" y="3200400"/>
-            <a:ext cx="914400" cy="216153"/>
+            <a:off x="5486400" y="5018532"/>
+            <a:ext cx="1828800" cy="216153"/>
           </a:xfrm>
           <a:prstGeom prst="rect">
             <a:avLst/>
@@ -3244,6 +4477,37 @@
           <a:lstStyle/>
           <a:p>
             <a:pPr algn="ctr">
+              <a:spcAft>
+                <a:spcPts val="0"/>
+              </a:spcAft>
+            </a:pPr>
+          </a:p>
+        </p:txBody>
+      </p:sp>
+      <p:sp>
+        <p:nvSpPr>
+          <p:cNvPr id="57" name="C1-E25 text 55" descr="sci-ppt:o055"/>
+          <p:cNvSpPr txBox="1"/>
+          <p:nvPr/>
+        </p:nvSpPr>
+        <p:spPr>
+          <a:xfrm>
+            <a:off x="6693408" y="5010912"/>
+            <a:ext cx="1371600" cy="216153"/>
+          </a:xfrm>
+          <a:prstGeom prst="rect">
+            <a:avLst/>
+          </a:prstGeom>
+          <a:noFill/>
+          <a:effectLst/>
+        </p:spPr>
+        <p:txBody>
+          <a:bodyPr wrap="none" lIns="18288" rIns="18288" tIns="18288" bIns="18288" anchor="t">
+            <a:spAutoFit/>
+          </a:bodyPr>
+          <a:lstStyle/>
+          <a:p>
+            <a:pPr algn="l">
               <a:spcAft>
                 <a:spcPts val="0"/>
               </a:spcAft>
@@ -3255,43 +4519,21 @@
                 </a:solidFill>
                 <a:latin typeface="Arial"/>
               </a:rPr>
-              <a:t>10⁻²</a:t>
-            </a:r>
-          </a:p>
-        </p:txBody>
-      </p:sp>
-      <p:cxnSp>
-        <p:nvCxnSpPr>
-          <p:cNvPr id="7" name="C1-E25 line 5" descr="sci-ppt:o005"/>
-          <p:cNvCxnSpPr/>
-          <p:nvPr/>
-        </p:nvCxnSpPr>
-        <p:spPr>
-          <a:xfrm>
-            <a:off x="2390502" y="3108960"/>
-            <a:ext cx="0" cy="73152"/>
-          </a:xfrm>
-          <a:prstGeom prst="line">
-            <a:avLst/>
-          </a:prstGeom>
-          <a:ln w="15240">
-            <a:solidFill>
-              <a:srgbClr val="B4C7D2"/>
-            </a:solidFill>
-          </a:ln>
-          <a:effectLst/>
-        </p:spPr>
-      </p:cxnSp>
-      <p:sp>
-        <p:nvSpPr>
-          <p:cNvPr id="8" name="C1-E25 text 6" descr="sci-ppt:o006"/>
+              <a:t>h = 0.6 Rₘₐₓ</a:t>
+            </a:r>
+          </a:p>
+        </p:txBody>
+      </p:sp>
+      <p:sp>
+        <p:nvSpPr>
+          <p:cNvPr id="58" name="C1-E25 text 56" descr="sci-ppt:o056"/>
           <p:cNvSpPr txBox="1"/>
           <p:nvPr/>
         </p:nvSpPr>
         <p:spPr>
           <a:xfrm>
-            <a:off x="1933302" y="3200400"/>
-            <a:ext cx="914400" cy="216153"/>
+            <a:off x="5120640" y="3712463"/>
+            <a:ext cx="1463040" cy="254889"/>
           </a:xfrm>
           <a:prstGeom prst="rect">
             <a:avLst/>
@@ -3306,6 +4548,198 @@
           <a:lstStyle/>
           <a:p>
             <a:pPr algn="ctr">
+              <a:spcAft>
+                <a:spcPts val="0"/>
+              </a:spcAft>
+            </a:pPr>
+            <a:r>
+              <a:rPr sz="1350" b="1" i="0">
+                <a:solidFill>
+                  <a:srgbClr val="8EDBD4"/>
+                </a:solidFill>
+                <a:latin typeface="Arial"/>
+              </a:rPr>
+              <a:t>γ = 0.6</a:t>
+            </a:r>
+          </a:p>
+        </p:txBody>
+      </p:sp>
+      <p:sp>
+        <p:nvSpPr>
+          <p:cNvPr id="59" name="C1-E25 ellipse 57" descr="sci-ppt:o057"/>
+          <p:cNvSpPr/>
+          <p:nvPr/>
+        </p:nvSpPr>
+        <p:spPr>
+          <a:xfrm>
+            <a:off x="7694675" y="3568903"/>
+            <a:ext cx="1069848" cy="1069848"/>
+          </a:xfrm>
+          <a:prstGeom prst="ellipse">
+            <a:avLst/>
+          </a:prstGeom>
+          <a:solidFill>
+            <a:srgbClr val="0C1820"/>
+          </a:solidFill>
+          <a:ln w="25400">
+            <a:solidFill>
+              <a:srgbClr val="F2B880"/>
+            </a:solidFill>
+          </a:ln>
+          <a:effectLst/>
+        </p:spPr>
+        <p:txBody>
+          <a:bodyPr rtlCol="0" anchor="ctr"/>
+          <a:lstStyle/>
+          <a:p>
+            <a:pPr algn="ctr"/>
+          </a:p>
+        </p:txBody>
+      </p:sp>
+      <p:cxnSp>
+        <p:nvCxnSpPr>
+          <p:cNvPr id="60" name="C1-E25 line 58" descr="sci-ppt:o058"/>
+          <p:cNvCxnSpPr/>
+          <p:nvPr/>
+        </p:nvCxnSpPr>
+        <p:spPr>
+          <a:xfrm>
+            <a:off x="8229600" y="4103827"/>
+            <a:ext cx="0" cy="1382573"/>
+          </a:xfrm>
+          <a:prstGeom prst="line">
+            <a:avLst/>
+          </a:prstGeom>
+          <a:ln w="15240">
+            <a:solidFill>
+              <a:srgbClr val="B4C7D2"/>
+            </a:solidFill>
+            <a:prstDash val="dash"/>
+          </a:ln>
+          <a:effectLst/>
+        </p:spPr>
+      </p:cxnSp>
+      <p:cxnSp>
+        <p:nvCxnSpPr>
+          <p:cNvPr id="61" name="C1-E25 line 59" descr="sci-ppt:o059"/>
+          <p:cNvCxnSpPr/>
+          <p:nvPr/>
+        </p:nvCxnSpPr>
+        <p:spPr>
+          <a:xfrm>
+            <a:off x="8887968" y="4103827"/>
+            <a:ext cx="0" cy="1382573"/>
+          </a:xfrm>
+          <a:prstGeom prst="line">
+            <a:avLst/>
+          </a:prstGeom>
+          <a:ln w="16510">
+            <a:solidFill>
+              <a:srgbClr val="B4C7D2"/>
+            </a:solidFill>
+          </a:ln>
+          <a:effectLst/>
+        </p:spPr>
+      </p:cxnSp>
+      <p:cxnSp>
+        <p:nvCxnSpPr>
+          <p:cNvPr id="62" name="C1-E25 line 60" descr="sci-ppt:o060"/>
+          <p:cNvCxnSpPr/>
+          <p:nvPr/>
+        </p:nvCxnSpPr>
+        <p:spPr>
+          <a:xfrm flipH="1">
+            <a:off x="8823960" y="4103827"/>
+            <a:ext cx="128016" cy="0"/>
+          </a:xfrm>
+          <a:prstGeom prst="line">
+            <a:avLst/>
+          </a:prstGeom>
+          <a:ln w="16510">
+            <a:solidFill>
+              <a:srgbClr val="B4C7D2"/>
+            </a:solidFill>
+          </a:ln>
+          <a:effectLst/>
+        </p:spPr>
+      </p:cxnSp>
+      <p:cxnSp>
+        <p:nvCxnSpPr>
+          <p:cNvPr id="63" name="C1-E25 line 61" descr="sci-ppt:o061"/>
+          <p:cNvCxnSpPr/>
+          <p:nvPr/>
+        </p:nvCxnSpPr>
+        <p:spPr>
+          <a:xfrm flipH="1">
+            <a:off x="8823960" y="5486400"/>
+            <a:ext cx="128016" cy="0"/>
+          </a:xfrm>
+          <a:prstGeom prst="line">
+            <a:avLst/>
+          </a:prstGeom>
+          <a:ln w="16510">
+            <a:solidFill>
+              <a:srgbClr val="B4C7D2"/>
+            </a:solidFill>
+          </a:ln>
+          <a:effectLst/>
+        </p:spPr>
+      </p:cxnSp>
+      <p:sp>
+        <p:nvSpPr>
+          <p:cNvPr id="64" name="C1-E25 text 62" descr="sci-ppt:o062"/>
+          <p:cNvSpPr txBox="1"/>
+          <p:nvPr/>
+        </p:nvSpPr>
+        <p:spPr>
+          <a:xfrm>
+            <a:off x="7790688" y="4711293"/>
+            <a:ext cx="1828800" cy="216153"/>
+          </a:xfrm>
+          <a:prstGeom prst="rect">
+            <a:avLst/>
+          </a:prstGeom>
+          <a:noFill/>
+          <a:effectLst/>
+        </p:spPr>
+        <p:txBody>
+          <a:bodyPr wrap="none" lIns="18288" rIns="18288" tIns="18288" bIns="18288" anchor="t">
+            <a:spAutoFit/>
+          </a:bodyPr>
+          <a:lstStyle/>
+          <a:p>
+            <a:pPr algn="ctr">
+              <a:spcAft>
+                <a:spcPts val="0"/>
+              </a:spcAft>
+            </a:pPr>
+          </a:p>
+        </p:txBody>
+      </p:sp>
+      <p:sp>
+        <p:nvSpPr>
+          <p:cNvPr id="65" name="C1-E25 text 63" descr="sci-ppt:o063"/>
+          <p:cNvSpPr txBox="1"/>
+          <p:nvPr/>
+        </p:nvSpPr>
+        <p:spPr>
+          <a:xfrm>
+            <a:off x="8997696" y="4703673"/>
+            <a:ext cx="1371600" cy="216153"/>
+          </a:xfrm>
+          <a:prstGeom prst="rect">
+            <a:avLst/>
+          </a:prstGeom>
+          <a:noFill/>
+          <a:effectLst/>
+        </p:spPr>
+        <p:txBody>
+          <a:bodyPr wrap="none" lIns="18288" rIns="18288" tIns="18288" bIns="18288" anchor="t">
+            <a:spAutoFit/>
+          </a:bodyPr>
+          <a:lstStyle/>
+          <a:p>
+            <a:pPr algn="l">
               <a:spcAft>
                 <a:spcPts val="0"/>
               </a:spcAft>
@@ -3317,43 +4751,21 @@
                 </a:solidFill>
                 <a:latin typeface="Arial"/>
               </a:rPr>
-              <a:t>10⁻¹</a:t>
-            </a:r>
-          </a:p>
-        </p:txBody>
-      </p:sp>
-      <p:cxnSp>
-        <p:nvCxnSpPr>
-          <p:cNvPr id="9" name="C1-E25 line 7" descr="sci-ppt:o007"/>
-          <p:cNvCxnSpPr/>
-          <p:nvPr/>
-        </p:nvCxnSpPr>
-        <p:spPr>
-          <a:xfrm>
-            <a:off x="3866605" y="3108960"/>
-            <a:ext cx="0" cy="73152"/>
-          </a:xfrm>
-          <a:prstGeom prst="line">
-            <a:avLst/>
-          </a:prstGeom>
-          <a:ln w="15240">
-            <a:solidFill>
-              <a:srgbClr val="B4C7D2"/>
-            </a:solidFill>
-          </a:ln>
-          <a:effectLst/>
-        </p:spPr>
-      </p:cxnSp>
-      <p:sp>
-        <p:nvSpPr>
-          <p:cNvPr id="10" name="C1-E25 text 8" descr="sci-ppt:o008"/>
+              <a:t>h = 1.2 Rₘₐₓ</a:t>
+            </a:r>
+          </a:p>
+        </p:txBody>
+      </p:sp>
+      <p:sp>
+        <p:nvSpPr>
+          <p:cNvPr id="66" name="C1-E25 text 64" descr="sci-ppt:o064"/>
           <p:cNvSpPr txBox="1"/>
           <p:nvPr/>
         </p:nvSpPr>
         <p:spPr>
           <a:xfrm>
-            <a:off x="3409405" y="3200400"/>
-            <a:ext cx="914400" cy="216153"/>
+            <a:off x="7498079" y="3157423"/>
+            <a:ext cx="1463040" cy="254889"/>
           </a:xfrm>
           <a:prstGeom prst="rect">
             <a:avLst/>
@@ -3368,6 +4780,198 @@
           <a:lstStyle/>
           <a:p>
             <a:pPr algn="ctr">
+              <a:spcAft>
+                <a:spcPts val="0"/>
+              </a:spcAft>
+            </a:pPr>
+            <a:r>
+              <a:rPr sz="1350" b="1" i="0">
+                <a:solidFill>
+                  <a:srgbClr val="8EDBD4"/>
+                </a:solidFill>
+                <a:latin typeface="Arial"/>
+              </a:rPr>
+              <a:t>γ = 1.2</a:t>
+            </a:r>
+          </a:p>
+        </p:txBody>
+      </p:sp>
+      <p:sp>
+        <p:nvSpPr>
+          <p:cNvPr id="67" name="C1-E25 ellipse 65" descr="sci-ppt:o065"/>
+          <p:cNvSpPr/>
+          <p:nvPr/>
+        </p:nvSpPr>
+        <p:spPr>
+          <a:xfrm>
+            <a:off x="10252709" y="2544318"/>
+            <a:ext cx="891540" cy="891540"/>
+          </a:xfrm>
+          <a:prstGeom prst="ellipse">
+            <a:avLst/>
+          </a:prstGeom>
+          <a:solidFill>
+            <a:srgbClr val="0C1820"/>
+          </a:solidFill>
+          <a:ln w="25400">
+            <a:solidFill>
+              <a:srgbClr val="F2B880"/>
+            </a:solidFill>
+          </a:ln>
+          <a:effectLst/>
+        </p:spPr>
+        <p:txBody>
+          <a:bodyPr rtlCol="0" anchor="ctr"/>
+          <a:lstStyle/>
+          <a:p>
+            <a:pPr algn="ctr"/>
+          </a:p>
+        </p:txBody>
+      </p:sp>
+      <p:cxnSp>
+        <p:nvCxnSpPr>
+          <p:cNvPr id="68" name="C1-E25 line 66" descr="sci-ppt:o066"/>
+          <p:cNvCxnSpPr/>
+          <p:nvPr/>
+        </p:nvCxnSpPr>
+        <p:spPr>
+          <a:xfrm>
+            <a:off x="10698480" y="2990088"/>
+            <a:ext cx="0" cy="2496312"/>
+          </a:xfrm>
+          <a:prstGeom prst="line">
+            <a:avLst/>
+          </a:prstGeom>
+          <a:ln w="15240">
+            <a:solidFill>
+              <a:srgbClr val="B4C7D2"/>
+            </a:solidFill>
+            <a:prstDash val="dash"/>
+          </a:ln>
+          <a:effectLst/>
+        </p:spPr>
+      </p:cxnSp>
+      <p:cxnSp>
+        <p:nvCxnSpPr>
+          <p:cNvPr id="69" name="C1-E25 line 67" descr="sci-ppt:o067"/>
+          <p:cNvCxnSpPr/>
+          <p:nvPr/>
+        </p:nvCxnSpPr>
+        <p:spPr>
+          <a:xfrm>
+            <a:off x="11247119" y="2990088"/>
+            <a:ext cx="0" cy="2496312"/>
+          </a:xfrm>
+          <a:prstGeom prst="line">
+            <a:avLst/>
+          </a:prstGeom>
+          <a:ln w="16510">
+            <a:solidFill>
+              <a:srgbClr val="B4C7D2"/>
+            </a:solidFill>
+          </a:ln>
+          <a:effectLst/>
+        </p:spPr>
+      </p:cxnSp>
+      <p:cxnSp>
+        <p:nvCxnSpPr>
+          <p:cNvPr id="70" name="C1-E25 line 68" descr="sci-ppt:o068"/>
+          <p:cNvCxnSpPr/>
+          <p:nvPr/>
+        </p:nvCxnSpPr>
+        <p:spPr>
+          <a:xfrm flipH="1">
+            <a:off x="11183111" y="2990088"/>
+            <a:ext cx="128017" cy="0"/>
+          </a:xfrm>
+          <a:prstGeom prst="line">
+            <a:avLst/>
+          </a:prstGeom>
+          <a:ln w="16510">
+            <a:solidFill>
+              <a:srgbClr val="B4C7D2"/>
+            </a:solidFill>
+          </a:ln>
+          <a:effectLst/>
+        </p:spPr>
+      </p:cxnSp>
+      <p:cxnSp>
+        <p:nvCxnSpPr>
+          <p:cNvPr id="71" name="C1-E25 line 69" descr="sci-ppt:o069"/>
+          <p:cNvCxnSpPr/>
+          <p:nvPr/>
+        </p:nvCxnSpPr>
+        <p:spPr>
+          <a:xfrm flipH="1">
+            <a:off x="11183111" y="5486400"/>
+            <a:ext cx="128017" cy="0"/>
+          </a:xfrm>
+          <a:prstGeom prst="line">
+            <a:avLst/>
+          </a:prstGeom>
+          <a:ln w="16510">
+            <a:solidFill>
+              <a:srgbClr val="B4C7D2"/>
+            </a:solidFill>
+          </a:ln>
+          <a:effectLst/>
+        </p:spPr>
+      </p:cxnSp>
+      <p:sp>
+        <p:nvSpPr>
+          <p:cNvPr id="72" name="C1-E25 text 70" descr="sci-ppt:o070"/>
+          <p:cNvSpPr txBox="1"/>
+          <p:nvPr/>
+        </p:nvSpPr>
+        <p:spPr>
+          <a:xfrm>
+            <a:off x="10149840" y="4154423"/>
+            <a:ext cx="1828800" cy="216153"/>
+          </a:xfrm>
+          <a:prstGeom prst="rect">
+            <a:avLst/>
+          </a:prstGeom>
+          <a:noFill/>
+          <a:effectLst/>
+        </p:spPr>
+        <p:txBody>
+          <a:bodyPr wrap="none" lIns="18288" rIns="18288" tIns="18288" bIns="18288" anchor="t">
+            <a:spAutoFit/>
+          </a:bodyPr>
+          <a:lstStyle/>
+          <a:p>
+            <a:pPr algn="ctr">
+              <a:spcAft>
+                <a:spcPts val="0"/>
+              </a:spcAft>
+            </a:pPr>
+          </a:p>
+        </p:txBody>
+      </p:sp>
+      <p:sp>
+        <p:nvSpPr>
+          <p:cNvPr id="73" name="C1-E25 text 71" descr="sci-ppt:o071"/>
+          <p:cNvSpPr txBox="1"/>
+          <p:nvPr/>
+        </p:nvSpPr>
+        <p:spPr>
+          <a:xfrm>
+            <a:off x="11356847" y="4146804"/>
+            <a:ext cx="1371600" cy="216153"/>
+          </a:xfrm>
+          <a:prstGeom prst="rect">
+            <a:avLst/>
+          </a:prstGeom>
+          <a:noFill/>
+          <a:effectLst/>
+        </p:spPr>
+        <p:txBody>
+          <a:bodyPr wrap="none" lIns="18288" rIns="18288" tIns="18288" bIns="18288" anchor="t">
+            <a:spAutoFit/>
+          </a:bodyPr>
+          <a:lstStyle/>
+          <a:p>
+            <a:pPr algn="l">
               <a:spcAft>
                 <a:spcPts val="0"/>
               </a:spcAft>
@@ -3379,43 +4983,21 @@
                 </a:solidFill>
                 <a:latin typeface="Arial"/>
               </a:rPr>
-              <a:t>10⁰</a:t>
-            </a:r>
-          </a:p>
-        </p:txBody>
-      </p:sp>
-      <p:cxnSp>
-        <p:nvCxnSpPr>
-          <p:cNvPr id="11" name="C1-E25 line 9" descr="sci-ppt:o009"/>
-          <p:cNvCxnSpPr/>
-          <p:nvPr/>
-        </p:nvCxnSpPr>
-        <p:spPr>
-          <a:xfrm>
-            <a:off x="5342708" y="3108960"/>
-            <a:ext cx="0" cy="73152"/>
-          </a:xfrm>
-          <a:prstGeom prst="line">
-            <a:avLst/>
-          </a:prstGeom>
-          <a:ln w="15240">
-            <a:solidFill>
-              <a:srgbClr val="B4C7D2"/>
-            </a:solidFill>
-          </a:ln>
-          <a:effectLst/>
-        </p:spPr>
-      </p:cxnSp>
-      <p:sp>
-        <p:nvSpPr>
-          <p:cNvPr id="12" name="C1-E25 text 10" descr="sci-ppt:o010"/>
+              <a:t>h = 2.6 Rₘₐₓ</a:t>
+            </a:r>
+          </a:p>
+        </p:txBody>
+      </p:sp>
+      <p:sp>
+        <p:nvSpPr>
+          <p:cNvPr id="74" name="C1-E25 text 72" descr="sci-ppt:o072"/>
           <p:cNvSpPr txBox="1"/>
           <p:nvPr/>
         </p:nvSpPr>
         <p:spPr>
           <a:xfrm>
-            <a:off x="4885508" y="3200400"/>
-            <a:ext cx="914400" cy="216153"/>
+            <a:off x="9966959" y="2132837"/>
+            <a:ext cx="1463040" cy="254889"/>
           </a:xfrm>
           <a:prstGeom prst="rect">
             <a:avLst/>
@@ -3430,734 +5012,6 @@
           <a:lstStyle/>
           <a:p>
             <a:pPr algn="ctr">
-              <a:spcAft>
-                <a:spcPts val="0"/>
-              </a:spcAft>
-            </a:pPr>
-            <a:r>
-              <a:rPr sz="1100" b="0" i="0">
-                <a:solidFill>
-                  <a:srgbClr val="B4C7D2"/>
-                </a:solidFill>
-                <a:latin typeface="Arial"/>
-              </a:rPr>
-              <a:t>10¹</a:t>
-            </a:r>
-          </a:p>
-        </p:txBody>
-      </p:sp>
-      <p:cxnSp>
-        <p:nvCxnSpPr>
-          <p:cNvPr id="13" name="C1-E25 line 11" descr="sci-ppt:o011"/>
-          <p:cNvCxnSpPr/>
-          <p:nvPr/>
-        </p:nvCxnSpPr>
-        <p:spPr>
-          <a:xfrm>
-            <a:off x="6818811" y="3108960"/>
-            <a:ext cx="0" cy="73152"/>
-          </a:xfrm>
-          <a:prstGeom prst="line">
-            <a:avLst/>
-          </a:prstGeom>
-          <a:ln w="15240">
-            <a:solidFill>
-              <a:srgbClr val="B4C7D2"/>
-            </a:solidFill>
-          </a:ln>
-          <a:effectLst/>
-        </p:spPr>
-      </p:cxnSp>
-      <p:sp>
-        <p:nvSpPr>
-          <p:cNvPr id="14" name="C1-E25 text 12" descr="sci-ppt:o012"/>
-          <p:cNvSpPr txBox="1"/>
-          <p:nvPr/>
-        </p:nvSpPr>
-        <p:spPr>
-          <a:xfrm>
-            <a:off x="6361611" y="3200400"/>
-            <a:ext cx="914400" cy="216153"/>
-          </a:xfrm>
-          <a:prstGeom prst="rect">
-            <a:avLst/>
-          </a:prstGeom>
-          <a:noFill/>
-          <a:effectLst/>
-        </p:spPr>
-        <p:txBody>
-          <a:bodyPr wrap="none" lIns="18288" rIns="18288" tIns="18288" bIns="18288" anchor="t">
-            <a:spAutoFit/>
-          </a:bodyPr>
-          <a:lstStyle/>
-          <a:p>
-            <a:pPr algn="ctr">
-              <a:spcAft>
-                <a:spcPts val="0"/>
-              </a:spcAft>
-            </a:pPr>
-            <a:r>
-              <a:rPr sz="1100" b="0" i="0">
-                <a:solidFill>
-                  <a:srgbClr val="B4C7D2"/>
-                </a:solidFill>
-                <a:latin typeface="Arial"/>
-              </a:rPr>
-              <a:t>10²</a:t>
-            </a:r>
-          </a:p>
-        </p:txBody>
-      </p:sp>
-      <p:cxnSp>
-        <p:nvCxnSpPr>
-          <p:cNvPr id="15" name="C1-E25 line 13" descr="sci-ppt:o013"/>
-          <p:cNvCxnSpPr/>
-          <p:nvPr/>
-        </p:nvCxnSpPr>
-        <p:spPr>
-          <a:xfrm>
-            <a:off x="8294914" y="3108960"/>
-            <a:ext cx="0" cy="73152"/>
-          </a:xfrm>
-          <a:prstGeom prst="line">
-            <a:avLst/>
-          </a:prstGeom>
-          <a:ln w="15240">
-            <a:solidFill>
-              <a:srgbClr val="B4C7D2"/>
-            </a:solidFill>
-          </a:ln>
-          <a:effectLst/>
-        </p:spPr>
-      </p:cxnSp>
-      <p:sp>
-        <p:nvSpPr>
-          <p:cNvPr id="16" name="C1-E25 text 14" descr="sci-ppt:o014"/>
-          <p:cNvSpPr txBox="1"/>
-          <p:nvPr/>
-        </p:nvSpPr>
-        <p:spPr>
-          <a:xfrm>
-            <a:off x="7837714" y="3200400"/>
-            <a:ext cx="914400" cy="216153"/>
-          </a:xfrm>
-          <a:prstGeom prst="rect">
-            <a:avLst/>
-          </a:prstGeom>
-          <a:noFill/>
-          <a:effectLst/>
-        </p:spPr>
-        <p:txBody>
-          <a:bodyPr wrap="none" lIns="18288" rIns="18288" tIns="18288" bIns="18288" anchor="t">
-            <a:spAutoFit/>
-          </a:bodyPr>
-          <a:lstStyle/>
-          <a:p>
-            <a:pPr algn="ctr">
-              <a:spcAft>
-                <a:spcPts val="0"/>
-              </a:spcAft>
-            </a:pPr>
-            <a:r>
-              <a:rPr sz="1100" b="0" i="0">
-                <a:solidFill>
-                  <a:srgbClr val="B4C7D2"/>
-                </a:solidFill>
-                <a:latin typeface="Arial"/>
-              </a:rPr>
-              <a:t>10³</a:t>
-            </a:r>
-          </a:p>
-        </p:txBody>
-      </p:sp>
-      <p:cxnSp>
-        <p:nvCxnSpPr>
-          <p:cNvPr id="17" name="C1-E25 line 15" descr="sci-ppt:o015"/>
-          <p:cNvCxnSpPr/>
-          <p:nvPr/>
-        </p:nvCxnSpPr>
-        <p:spPr>
-          <a:xfrm>
-            <a:off x="9771017" y="3108960"/>
-            <a:ext cx="0" cy="73152"/>
-          </a:xfrm>
-          <a:prstGeom prst="line">
-            <a:avLst/>
-          </a:prstGeom>
-          <a:ln w="15240">
-            <a:solidFill>
-              <a:srgbClr val="B4C7D2"/>
-            </a:solidFill>
-          </a:ln>
-          <a:effectLst/>
-        </p:spPr>
-      </p:cxnSp>
-      <p:sp>
-        <p:nvSpPr>
-          <p:cNvPr id="18" name="C1-E25 text 16" descr="sci-ppt:o016"/>
-          <p:cNvSpPr txBox="1"/>
-          <p:nvPr/>
-        </p:nvSpPr>
-        <p:spPr>
-          <a:xfrm>
-            <a:off x="9313817" y="3200400"/>
-            <a:ext cx="914400" cy="216153"/>
-          </a:xfrm>
-          <a:prstGeom prst="rect">
-            <a:avLst/>
-          </a:prstGeom>
-          <a:noFill/>
-          <a:effectLst/>
-        </p:spPr>
-        <p:txBody>
-          <a:bodyPr wrap="none" lIns="18288" rIns="18288" tIns="18288" bIns="18288" anchor="t">
-            <a:spAutoFit/>
-          </a:bodyPr>
-          <a:lstStyle/>
-          <a:p>
-            <a:pPr algn="ctr">
-              <a:spcAft>
-                <a:spcPts val="0"/>
-              </a:spcAft>
-            </a:pPr>
-            <a:r>
-              <a:rPr sz="1100" b="0" i="0">
-                <a:solidFill>
-                  <a:srgbClr val="B4C7D2"/>
-                </a:solidFill>
-                <a:latin typeface="Arial"/>
-              </a:rPr>
-              <a:t>10⁴</a:t>
-            </a:r>
-          </a:p>
-        </p:txBody>
-      </p:sp>
-      <p:cxnSp>
-        <p:nvCxnSpPr>
-          <p:cNvPr id="19" name="C1-E25 line 17" descr="sci-ppt:o017"/>
-          <p:cNvCxnSpPr/>
-          <p:nvPr/>
-        </p:nvCxnSpPr>
-        <p:spPr>
-          <a:xfrm>
-            <a:off x="11247120" y="3108960"/>
-            <a:ext cx="0" cy="73152"/>
-          </a:xfrm>
-          <a:prstGeom prst="line">
-            <a:avLst/>
-          </a:prstGeom>
-          <a:ln w="15240">
-            <a:solidFill>
-              <a:srgbClr val="B4C7D2"/>
-            </a:solidFill>
-          </a:ln>
-          <a:effectLst/>
-        </p:spPr>
-      </p:cxnSp>
-      <p:sp>
-        <p:nvSpPr>
-          <p:cNvPr id="20" name="C1-E25 text 18" descr="sci-ppt:o018"/>
-          <p:cNvSpPr txBox="1"/>
-          <p:nvPr/>
-        </p:nvSpPr>
-        <p:spPr>
-          <a:xfrm>
-            <a:off x="10789920" y="3200400"/>
-            <a:ext cx="914400" cy="216153"/>
-          </a:xfrm>
-          <a:prstGeom prst="rect">
-            <a:avLst/>
-          </a:prstGeom>
-          <a:noFill/>
-          <a:effectLst/>
-        </p:spPr>
-        <p:txBody>
-          <a:bodyPr wrap="none" lIns="18288" rIns="18288" tIns="18288" bIns="18288" anchor="t">
-            <a:spAutoFit/>
-          </a:bodyPr>
-          <a:lstStyle/>
-          <a:p>
-            <a:pPr algn="ctr">
-              <a:spcAft>
-                <a:spcPts val="0"/>
-              </a:spcAft>
-            </a:pPr>
-            <a:r>
-              <a:rPr sz="1100" b="0" i="0">
-                <a:solidFill>
-                  <a:srgbClr val="B4C7D2"/>
-                </a:solidFill>
-                <a:latin typeface="Arial"/>
-              </a:rPr>
-              <a:t>10⁵</a:t>
-            </a:r>
-          </a:p>
-        </p:txBody>
-      </p:sp>
-      <p:cxnSp>
-        <p:nvCxnSpPr>
-          <p:cNvPr id="21" name="C1-E25 line 19" descr="sci-ppt:o019"/>
-          <p:cNvCxnSpPr/>
-          <p:nvPr/>
-        </p:nvCxnSpPr>
-        <p:spPr>
-          <a:xfrm flipV="1">
-            <a:off x="2130894" y="2834640"/>
-            <a:ext cx="0" cy="274320"/>
-          </a:xfrm>
-          <a:prstGeom prst="line">
-            <a:avLst/>
-          </a:prstGeom>
-          <a:ln w="27940">
-            <a:solidFill>
-              <a:srgbClr val="7FC8F8"/>
-            </a:solidFill>
-          </a:ln>
-          <a:effectLst/>
-        </p:spPr>
-      </p:cxnSp>
-      <p:sp>
-        <p:nvSpPr>
-          <p:cNvPr id="22" name="C1-E25 ellipse 20" descr="sci-ppt:o020"/>
-          <p:cNvSpPr/>
-          <p:nvPr/>
-        </p:nvSpPr>
-        <p:spPr>
-          <a:xfrm>
-            <a:off x="2048598" y="3026664"/>
-            <a:ext cx="164592" cy="164592"/>
-          </a:xfrm>
-          <a:prstGeom prst="ellipse">
-            <a:avLst/>
-          </a:prstGeom>
-          <a:solidFill>
-            <a:srgbClr val="7FC8F8"/>
-          </a:solidFill>
-          <a:ln w="12700">
-            <a:solidFill>
-              <a:srgbClr val="7FC8F8"/>
-            </a:solidFill>
-          </a:ln>
-          <a:effectLst/>
-        </p:spPr>
-        <p:txBody>
-          <a:bodyPr rtlCol="0" anchor="ctr"/>
-          <a:lstStyle/>
-          <a:p>
-            <a:pPr algn="ctr"/>
-          </a:p>
-        </p:txBody>
-      </p:sp>
-      <p:sp>
-        <p:nvSpPr>
-          <p:cNvPr id="23" name="C1-E25 text 21" descr="sci-ppt:o021"/>
-          <p:cNvSpPr txBox="1"/>
-          <p:nvPr/>
-        </p:nvSpPr>
-        <p:spPr>
-          <a:xfrm>
-            <a:off x="1033614" y="2148840"/>
-            <a:ext cx="2194560" cy="417576"/>
-          </a:xfrm>
-          <a:prstGeom prst="rect">
-            <a:avLst/>
-          </a:prstGeom>
-          <a:noFill/>
-          <a:effectLst/>
-        </p:spPr>
-        <p:txBody>
-          <a:bodyPr wrap="none" lIns="18288" rIns="18288" tIns="18288" bIns="18288" anchor="t">
-            <a:spAutoFit/>
-          </a:bodyPr>
-          <a:lstStyle/>
-          <a:p>
-            <a:pPr algn="ctr">
-              <a:spcAft>
-                <a:spcPts val="0"/>
-              </a:spcAft>
-            </a:pPr>
-            <a:r>
-              <a:rPr sz="1200" b="1" i="0">
-                <a:solidFill>
-                  <a:srgbClr val="7FC8F8"/>
-                </a:solidFill>
-                <a:latin typeface="Arial"/>
-              </a:rPr>
-              <a:t>acoustic crossing</a:t>
-            </a:r>
-          </a:p>
-          <a:p>
-            <a:pPr algn="ctr">
-              <a:spcAft>
-                <a:spcPts val="0"/>
-              </a:spcAft>
-            </a:pPr>
-            <a:r>
-              <a:rPr sz="1200" b="1" i="0">
-                <a:solidFill>
-                  <a:srgbClr val="7FC8F8"/>
-                </a:solidFill>
-                <a:latin typeface="Arial"/>
-              </a:rPr>
-              <a:t>tₐ = L/c = 0.067 µs</a:t>
-            </a:r>
-          </a:p>
-        </p:txBody>
-      </p:sp>
-      <p:cxnSp>
-        <p:nvCxnSpPr>
-          <p:cNvPr id="24" name="C1-E25 line 22" descr="sci-ppt:o022"/>
-          <p:cNvCxnSpPr/>
-          <p:nvPr/>
-        </p:nvCxnSpPr>
-        <p:spPr>
-          <a:xfrm flipV="1">
-            <a:off x="3422254" y="2103120"/>
-            <a:ext cx="0" cy="1005840"/>
-          </a:xfrm>
-          <a:prstGeom prst="line">
-            <a:avLst/>
-          </a:prstGeom>
-          <a:ln w="27940">
-            <a:solidFill>
-              <a:srgbClr val="8EDBD4"/>
-            </a:solidFill>
-          </a:ln>
-          <a:effectLst/>
-        </p:spPr>
-      </p:cxnSp>
-      <p:sp>
-        <p:nvSpPr>
-          <p:cNvPr id="25" name="C1-E25 ellipse 23" descr="sci-ppt:o023"/>
-          <p:cNvSpPr/>
-          <p:nvPr/>
-        </p:nvSpPr>
-        <p:spPr>
-          <a:xfrm>
-            <a:off x="3339958" y="3026664"/>
-            <a:ext cx="164592" cy="164592"/>
-          </a:xfrm>
-          <a:prstGeom prst="ellipse">
-            <a:avLst/>
-          </a:prstGeom>
-          <a:solidFill>
-            <a:srgbClr val="8EDBD4"/>
-          </a:solidFill>
-          <a:ln w="12700">
-            <a:solidFill>
-              <a:srgbClr val="8EDBD4"/>
-            </a:solidFill>
-          </a:ln>
-          <a:effectLst/>
-        </p:spPr>
-        <p:txBody>
-          <a:bodyPr rtlCol="0" anchor="ctr"/>
-          <a:lstStyle/>
-          <a:p>
-            <a:pPr algn="ctr"/>
-          </a:p>
-        </p:txBody>
-      </p:sp>
-      <p:sp>
-        <p:nvSpPr>
-          <p:cNvPr id="26" name="C1-E25 text 24" descr="sci-ppt:o024"/>
-          <p:cNvSpPr txBox="1"/>
-          <p:nvPr/>
-        </p:nvSpPr>
-        <p:spPr>
-          <a:xfrm>
-            <a:off x="2324974" y="1417320"/>
-            <a:ext cx="2194560" cy="417576"/>
-          </a:xfrm>
-          <a:prstGeom prst="rect">
-            <a:avLst/>
-          </a:prstGeom>
-          <a:noFill/>
-          <a:effectLst/>
-        </p:spPr>
-        <p:txBody>
-          <a:bodyPr wrap="none" lIns="18288" rIns="18288" tIns="18288" bIns="18288" anchor="t">
-            <a:spAutoFit/>
-          </a:bodyPr>
-          <a:lstStyle/>
-          <a:p>
-            <a:pPr algn="ctr">
-              <a:spcAft>
-                <a:spcPts val="0"/>
-              </a:spcAft>
-            </a:pPr>
-            <a:r>
-              <a:rPr sz="1200" b="1" i="0">
-                <a:solidFill>
-                  <a:srgbClr val="8EDBD4"/>
-                </a:solidFill>
-                <a:latin typeface="Arial"/>
-              </a:rPr>
-              <a:t>pulse duration</a:t>
-            </a:r>
-          </a:p>
-          <a:p>
-            <a:pPr algn="ctr">
-              <a:spcAft>
-                <a:spcPts val="0"/>
-              </a:spcAft>
-            </a:pPr>
-            <a:r>
-              <a:rPr sz="1200" b="1" i="0">
-                <a:solidFill>
-                  <a:srgbClr val="8EDBD4"/>
-                </a:solidFill>
-                <a:latin typeface="Arial"/>
-              </a:rPr>
-              <a:t>τ = 0.5 µs</a:t>
-            </a:r>
-          </a:p>
-        </p:txBody>
-      </p:sp>
-      <p:cxnSp>
-        <p:nvCxnSpPr>
-          <p:cNvPr id="27" name="C1-E25 line 25" descr="sci-ppt:o025"/>
-          <p:cNvCxnSpPr/>
-          <p:nvPr/>
-        </p:nvCxnSpPr>
-        <p:spPr>
-          <a:xfrm flipV="1">
-            <a:off x="6113889" y="2834640"/>
-            <a:ext cx="0" cy="274320"/>
-          </a:xfrm>
-          <a:prstGeom prst="line">
-            <a:avLst/>
-          </a:prstGeom>
-          <a:ln w="27940">
-            <a:solidFill>
-              <a:srgbClr val="F2B880"/>
-            </a:solidFill>
-          </a:ln>
-          <a:effectLst/>
-        </p:spPr>
-      </p:cxnSp>
-      <p:sp>
-        <p:nvSpPr>
-          <p:cNvPr id="28" name="C1-E25 ellipse 26" descr="sci-ppt:o026"/>
-          <p:cNvSpPr/>
-          <p:nvPr/>
-        </p:nvSpPr>
-        <p:spPr>
-          <a:xfrm>
-            <a:off x="6031593" y="3026664"/>
-            <a:ext cx="164592" cy="164592"/>
-          </a:xfrm>
-          <a:prstGeom prst="ellipse">
-            <a:avLst/>
-          </a:prstGeom>
-          <a:solidFill>
-            <a:srgbClr val="F2B880"/>
-          </a:solidFill>
-          <a:ln w="12700">
-            <a:solidFill>
-              <a:srgbClr val="F2B880"/>
-            </a:solidFill>
-          </a:ln>
-          <a:effectLst/>
-        </p:spPr>
-        <p:txBody>
-          <a:bodyPr rtlCol="0" anchor="ctr"/>
-          <a:lstStyle/>
-          <a:p>
-            <a:pPr algn="ctr"/>
-          </a:p>
-        </p:txBody>
-      </p:sp>
-      <p:sp>
-        <p:nvSpPr>
-          <p:cNvPr id="29" name="C1-E25 text 27" descr="sci-ppt:o027"/>
-          <p:cNvSpPr txBox="1"/>
-          <p:nvPr/>
-        </p:nvSpPr>
-        <p:spPr>
-          <a:xfrm>
-            <a:off x="5016609" y="2148840"/>
-            <a:ext cx="2194560" cy="417576"/>
-          </a:xfrm>
-          <a:prstGeom prst="rect">
-            <a:avLst/>
-          </a:prstGeom>
-          <a:noFill/>
-          <a:effectLst/>
-        </p:spPr>
-        <p:txBody>
-          <a:bodyPr wrap="none" lIns="18288" rIns="18288" tIns="18288" bIns="18288" anchor="t">
-            <a:spAutoFit/>
-          </a:bodyPr>
-          <a:lstStyle/>
-          <a:p>
-            <a:pPr algn="ctr">
-              <a:spcAft>
-                <a:spcPts val="0"/>
-              </a:spcAft>
-            </a:pPr>
-            <a:r>
-              <a:rPr sz="1200" b="1" i="0">
-                <a:solidFill>
-                  <a:srgbClr val="F2B880"/>
-                </a:solidFill>
-                <a:latin typeface="Arial"/>
-              </a:rPr>
-              <a:t>convective time</a:t>
-            </a:r>
-          </a:p>
-          <a:p>
-            <a:pPr algn="ctr">
-              <a:spcAft>
-                <a:spcPts val="0"/>
-              </a:spcAft>
-            </a:pPr>
-            <a:r>
-              <a:rPr sz="1200" b="1" i="0">
-                <a:solidFill>
-                  <a:srgbClr val="F2B880"/>
-                </a:solidFill>
-                <a:latin typeface="Arial"/>
-              </a:rPr>
-              <a:t>L/U = 33 µs</a:t>
-            </a:r>
-          </a:p>
-        </p:txBody>
-      </p:sp>
-      <p:cxnSp>
-        <p:nvCxnSpPr>
-          <p:cNvPr id="30" name="C1-E25 line 28" descr="sci-ppt:o028"/>
-          <p:cNvCxnSpPr/>
-          <p:nvPr/>
-        </p:nvCxnSpPr>
-        <p:spPr>
-          <a:xfrm flipV="1">
-            <a:off x="9771017" y="2103120"/>
-            <a:ext cx="0" cy="1005840"/>
-          </a:xfrm>
-          <a:prstGeom prst="line">
-            <a:avLst/>
-          </a:prstGeom>
-          <a:ln w="27940">
-            <a:solidFill>
-              <a:srgbClr val="F28BA0"/>
-            </a:solidFill>
-          </a:ln>
-          <a:effectLst/>
-        </p:spPr>
-      </p:cxnSp>
-      <p:sp>
-        <p:nvSpPr>
-          <p:cNvPr id="31" name="C1-E25 ellipse 29" descr="sci-ppt:o029"/>
-          <p:cNvSpPr/>
-          <p:nvPr/>
-        </p:nvSpPr>
-        <p:spPr>
-          <a:xfrm>
-            <a:off x="9688721" y="3026664"/>
-            <a:ext cx="164592" cy="164592"/>
-          </a:xfrm>
-          <a:prstGeom prst="ellipse">
-            <a:avLst/>
-          </a:prstGeom>
-          <a:solidFill>
-            <a:srgbClr val="F28BA0"/>
-          </a:solidFill>
-          <a:ln w="12700">
-            <a:solidFill>
-              <a:srgbClr val="F28BA0"/>
-            </a:solidFill>
-          </a:ln>
-          <a:effectLst/>
-        </p:spPr>
-        <p:txBody>
-          <a:bodyPr rtlCol="0" anchor="ctr"/>
-          <a:lstStyle/>
-          <a:p>
-            <a:pPr algn="ctr"/>
-          </a:p>
-        </p:txBody>
-      </p:sp>
-      <p:sp>
-        <p:nvSpPr>
-          <p:cNvPr id="32" name="C1-E25 text 30" descr="sci-ppt:o030"/>
-          <p:cNvSpPr txBox="1"/>
-          <p:nvPr/>
-        </p:nvSpPr>
-        <p:spPr>
-          <a:xfrm>
-            <a:off x="8673737" y="1417320"/>
-            <a:ext cx="2194560" cy="417576"/>
-          </a:xfrm>
-          <a:prstGeom prst="rect">
-            <a:avLst/>
-          </a:prstGeom>
-          <a:noFill/>
-          <a:effectLst/>
-        </p:spPr>
-        <p:txBody>
-          <a:bodyPr wrap="none" lIns="18288" rIns="18288" tIns="18288" bIns="18288" anchor="t">
-            <a:spAutoFit/>
-          </a:bodyPr>
-          <a:lstStyle/>
-          <a:p>
-            <a:pPr algn="ctr">
-              <a:spcAft>
-                <a:spcPts val="0"/>
-              </a:spcAft>
-            </a:pPr>
-            <a:r>
-              <a:rPr sz="1200" b="1" i="0">
-                <a:solidFill>
-                  <a:srgbClr val="F28BA0"/>
-                </a:solidFill>
-                <a:latin typeface="Arial"/>
-              </a:rPr>
-              <a:t>viscous time</a:t>
-            </a:r>
-          </a:p>
-          <a:p>
-            <a:pPr algn="ctr">
-              <a:spcAft>
-                <a:spcPts val="0"/>
-              </a:spcAft>
-            </a:pPr>
-            <a:r>
-              <a:rPr sz="1200" b="1" i="0">
-                <a:solidFill>
-                  <a:srgbClr val="F28BA0"/>
-                </a:solidFill>
-                <a:latin typeface="Arial"/>
-              </a:rPr>
-              <a:t>L²/ν = 10 ms</a:t>
-            </a:r>
-          </a:p>
-        </p:txBody>
-      </p:sp>
-      <p:sp>
-        <p:nvSpPr>
-          <p:cNvPr id="33" name="C1-E25 text 31" descr="sci-ppt:o031"/>
-          <p:cNvSpPr txBox="1"/>
-          <p:nvPr/>
-        </p:nvSpPr>
-        <p:spPr>
-          <a:xfrm>
-            <a:off x="914400" y="3749039"/>
-            <a:ext cx="10332720" cy="254889"/>
-          </a:xfrm>
-          <a:prstGeom prst="rect">
-            <a:avLst/>
-          </a:prstGeom>
-          <a:noFill/>
-          <a:effectLst/>
-        </p:spPr>
-        <p:txBody>
-          <a:bodyPr wrap="none" lIns="18288" rIns="18288" tIns="18288" bIns="18288" anchor="t">
-            <a:spAutoFit/>
-          </a:bodyPr>
-          <a:lstStyle/>
-          <a:p>
-            <a:pPr algn="l">
               <a:spcAft>
                 <a:spcPts val="0"/>
               </a:spcAft>
@@ -4169,389 +5023,21 @@
                 </a:solidFill>
                 <a:latin typeface="Arial"/>
               </a:rPr>
-              <a:t>Ratios of the declared case</a:t>
-            </a:r>
-          </a:p>
-        </p:txBody>
-      </p:sp>
-      <p:sp>
-        <p:nvSpPr>
-          <p:cNvPr id="34" name="C1-E25 round_rect 32" descr="sci-ppt:o032"/>
-          <p:cNvSpPr/>
-          <p:nvPr/>
-        </p:nvSpPr>
-        <p:spPr>
-          <a:xfrm>
-            <a:off x="914400" y="4114800"/>
-            <a:ext cx="3291840" cy="1417320"/>
-          </a:xfrm>
-          <a:prstGeom prst="roundRect">
-            <a:avLst/>
-          </a:prstGeom>
-          <a:solidFill>
-            <a:srgbClr val="213E4B"/>
-          </a:solidFill>
-          <a:ln w="20320">
-            <a:solidFill>
-              <a:srgbClr val="F2B880"/>
-            </a:solidFill>
-          </a:ln>
-          <a:effectLst/>
-        </p:spPr>
-        <p:txBody>
-          <a:bodyPr rtlCol="0" anchor="ctr"/>
-          <a:lstStyle/>
-          <a:p>
-            <a:pPr algn="ctr"/>
-          </a:p>
-        </p:txBody>
-      </p:sp>
-      <p:sp>
-        <p:nvSpPr>
-          <p:cNvPr id="35" name="C1-E25 text 33" descr="sci-ppt:o033"/>
+              <a:t>γ = 2.6</a:t>
+            </a:r>
+          </a:p>
+        </p:txBody>
+      </p:sp>
+      <p:sp>
+        <p:nvSpPr>
+          <p:cNvPr id="75" name="C1-E25 text 73" descr="sci-ppt:o073"/>
           <p:cNvSpPr txBox="1"/>
           <p:nvPr/>
         </p:nvSpPr>
         <p:spPr>
           <a:xfrm>
-            <a:off x="1005840" y="4187952"/>
-            <a:ext cx="3108960" cy="278130"/>
-          </a:xfrm>
-          <a:prstGeom prst="rect">
-            <a:avLst/>
-          </a:prstGeom>
-          <a:noFill/>
-          <a:effectLst/>
-        </p:spPr>
-        <p:txBody>
-          <a:bodyPr wrap="none" lIns="18288" rIns="18288" tIns="18288" bIns="18288" anchor="t">
-            <a:spAutoFit/>
-          </a:bodyPr>
-          <a:lstStyle/>
-          <a:p>
-            <a:pPr algn="ctr">
-              <a:spcAft>
-                <a:spcPts val="0"/>
-              </a:spcAft>
-            </a:pPr>
-            <a:r>
-              <a:rPr sz="1500" b="1" i="0">
-                <a:solidFill>
-                  <a:srgbClr val="F2B880"/>
-                </a:solidFill>
-                <a:latin typeface="Arial"/>
-              </a:rPr>
-              <a:t>Uτ/L = 0.015</a:t>
-            </a:r>
-          </a:p>
-        </p:txBody>
-      </p:sp>
-      <p:sp>
-        <p:nvSpPr>
-          <p:cNvPr id="36" name="C1-E25 text 34" descr="sci-ppt:o034"/>
-          <p:cNvSpPr txBox="1"/>
-          <p:nvPr/>
-        </p:nvSpPr>
-        <p:spPr>
-          <a:xfrm>
-            <a:off x="1005840" y="4617720"/>
-            <a:ext cx="3108960" cy="231648"/>
-          </a:xfrm>
-          <a:prstGeom prst="rect">
-            <a:avLst/>
-          </a:prstGeom>
-          <a:noFill/>
-          <a:effectLst/>
-        </p:spPr>
-        <p:txBody>
-          <a:bodyPr wrap="none" lIns="18288" rIns="18288" tIns="18288" bIns="18288" anchor="t">
-            <a:spAutoFit/>
-          </a:bodyPr>
-          <a:lstStyle/>
-          <a:p>
-            <a:pPr algn="ctr">
-              <a:spcAft>
-                <a:spcPts val="0"/>
-              </a:spcAft>
-            </a:pPr>
-            <a:r>
-              <a:rPr sz="1200" b="0" i="0">
-                <a:solidFill>
-                  <a:srgbClr val="E7F0F3"/>
-                </a:solidFill>
-                <a:latin typeface="Arial"/>
-              </a:rPr>
-              <a:t>τ ≪ convective time ✓</a:t>
-            </a:r>
-          </a:p>
-        </p:txBody>
-      </p:sp>
-      <p:sp>
-        <p:nvSpPr>
-          <p:cNvPr id="37" name="C1-E25 round_rect 35" descr="sci-ppt:o035"/>
-          <p:cNvSpPr/>
-          <p:nvPr/>
-        </p:nvSpPr>
-        <p:spPr>
-          <a:xfrm>
-            <a:off x="4434840" y="4114800"/>
-            <a:ext cx="3291840" cy="1417320"/>
-          </a:xfrm>
-          <a:prstGeom prst="roundRect">
-            <a:avLst/>
-          </a:prstGeom>
-          <a:solidFill>
-            <a:srgbClr val="213E4B"/>
-          </a:solidFill>
-          <a:ln w="20320">
-            <a:solidFill>
-              <a:srgbClr val="F28BA0"/>
-            </a:solidFill>
-          </a:ln>
-          <a:effectLst/>
-        </p:spPr>
-        <p:txBody>
-          <a:bodyPr rtlCol="0" anchor="ctr"/>
-          <a:lstStyle/>
-          <a:p>
-            <a:pPr algn="ctr"/>
-          </a:p>
-        </p:txBody>
-      </p:sp>
-      <p:sp>
-        <p:nvSpPr>
-          <p:cNvPr id="38" name="C1-E25 text 36" descr="sci-ppt:o036"/>
-          <p:cNvSpPr txBox="1"/>
-          <p:nvPr/>
-        </p:nvSpPr>
-        <p:spPr>
-          <a:xfrm>
-            <a:off x="4526279" y="4187952"/>
-            <a:ext cx="3108960" cy="278130"/>
-          </a:xfrm>
-          <a:prstGeom prst="rect">
-            <a:avLst/>
-          </a:prstGeom>
-          <a:noFill/>
-          <a:effectLst/>
-        </p:spPr>
-        <p:txBody>
-          <a:bodyPr wrap="none" lIns="18288" rIns="18288" tIns="18288" bIns="18288" anchor="t">
-            <a:spAutoFit/>
-          </a:bodyPr>
-          <a:lstStyle/>
-          <a:p>
-            <a:pPr algn="ctr">
-              <a:spcAft>
-                <a:spcPts val="0"/>
-              </a:spcAft>
-            </a:pPr>
-            <a:r>
-              <a:rPr sz="1500" b="1" i="0">
-                <a:solidFill>
-                  <a:srgbClr val="F28BA0"/>
-                </a:solidFill>
-                <a:latin typeface="Arial"/>
-              </a:rPr>
-              <a:t>ντ/L² = 5×10⁻⁵</a:t>
-            </a:r>
-          </a:p>
-        </p:txBody>
-      </p:sp>
-      <p:sp>
-        <p:nvSpPr>
-          <p:cNvPr id="39" name="C1-E25 text 37" descr="sci-ppt:o037"/>
-          <p:cNvSpPr txBox="1"/>
-          <p:nvPr/>
-        </p:nvSpPr>
-        <p:spPr>
-          <a:xfrm>
-            <a:off x="4526279" y="4617720"/>
-            <a:ext cx="3108960" cy="231648"/>
-          </a:xfrm>
-          <a:prstGeom prst="rect">
-            <a:avLst/>
-          </a:prstGeom>
-          <a:noFill/>
-          <a:effectLst/>
-        </p:spPr>
-        <p:txBody>
-          <a:bodyPr wrap="none" lIns="18288" rIns="18288" tIns="18288" bIns="18288" anchor="t">
-            <a:spAutoFit/>
-          </a:bodyPr>
-          <a:lstStyle/>
-          <a:p>
-            <a:pPr algn="ctr">
-              <a:spcAft>
-                <a:spcPts val="0"/>
-              </a:spcAft>
-            </a:pPr>
-            <a:r>
-              <a:rPr sz="1200" b="0" i="0">
-                <a:solidFill>
-                  <a:srgbClr val="E7F0F3"/>
-                </a:solidFill>
-                <a:latin typeface="Arial"/>
-              </a:rPr>
-              <a:t>τ ≪ viscous time ✓</a:t>
-            </a:r>
-          </a:p>
-        </p:txBody>
-      </p:sp>
-      <p:sp>
-        <p:nvSpPr>
-          <p:cNvPr id="40" name="C1-E25 round_rect 38" descr="sci-ppt:o038"/>
-          <p:cNvSpPr/>
-          <p:nvPr/>
-        </p:nvSpPr>
-        <p:spPr>
-          <a:xfrm>
-            <a:off x="7955279" y="4114800"/>
-            <a:ext cx="3291840" cy="1417320"/>
-          </a:xfrm>
-          <a:prstGeom prst="roundRect">
-            <a:avLst/>
-          </a:prstGeom>
-          <a:solidFill>
-            <a:srgbClr val="213E4B"/>
-          </a:solidFill>
-          <a:ln w="20320">
-            <a:solidFill>
-              <a:srgbClr val="7FC8F8"/>
-            </a:solidFill>
-          </a:ln>
-          <a:effectLst/>
-        </p:spPr>
-        <p:txBody>
-          <a:bodyPr rtlCol="0" anchor="ctr"/>
-          <a:lstStyle/>
-          <a:p>
-            <a:pPr algn="ctr"/>
-          </a:p>
-        </p:txBody>
-      </p:sp>
-      <p:sp>
-        <p:nvSpPr>
-          <p:cNvPr id="41" name="C1-E25 text 39" descr="sci-ppt:o039"/>
-          <p:cNvSpPr txBox="1"/>
-          <p:nvPr/>
-        </p:nvSpPr>
-        <p:spPr>
-          <a:xfrm>
-            <a:off x="8046719" y="4187952"/>
-            <a:ext cx="3108960" cy="278130"/>
-          </a:xfrm>
-          <a:prstGeom prst="rect">
-            <a:avLst/>
-          </a:prstGeom>
-          <a:noFill/>
-          <a:effectLst/>
-        </p:spPr>
-        <p:txBody>
-          <a:bodyPr wrap="none" lIns="18288" rIns="18288" tIns="18288" bIns="18288" anchor="t">
-            <a:spAutoFit/>
-          </a:bodyPr>
-          <a:lstStyle/>
-          <a:p>
-            <a:pPr algn="ctr">
-              <a:spcAft>
-                <a:spcPts val="0"/>
-              </a:spcAft>
-            </a:pPr>
-            <a:r>
-              <a:rPr sz="1500" b="1" i="0">
-                <a:solidFill>
-                  <a:srgbClr val="7FC8F8"/>
-                </a:solidFill>
-                <a:latin typeface="Arial"/>
-              </a:rPr>
-              <a:t>τ / tₐ = 7.5</a:t>
-            </a:r>
-          </a:p>
-        </p:txBody>
-      </p:sp>
-      <p:sp>
-        <p:nvSpPr>
-          <p:cNvPr id="42" name="C1-E25 text 40" descr="sci-ppt:o040"/>
-          <p:cNvSpPr txBox="1"/>
-          <p:nvPr/>
-        </p:nvSpPr>
-        <p:spPr>
-          <a:xfrm>
-            <a:off x="8046719" y="4617720"/>
-            <a:ext cx="3108960" cy="603504"/>
-          </a:xfrm>
-          <a:prstGeom prst="rect">
-            <a:avLst/>
-          </a:prstGeom>
-          <a:noFill/>
-          <a:effectLst/>
-        </p:spPr>
-        <p:txBody>
-          <a:bodyPr wrap="none" lIns="18288" rIns="18288" tIns="18288" bIns="18288" anchor="t">
-            <a:spAutoFit/>
-          </a:bodyPr>
-          <a:lstStyle/>
-          <a:p>
-            <a:pPr algn="ctr">
-              <a:spcAft>
-                <a:spcPts val="0"/>
-              </a:spcAft>
-            </a:pPr>
-            <a:r>
-              <a:rPr sz="1200" b="0" i="0">
-                <a:solidFill>
-                  <a:srgbClr val="E7F0F3"/>
-                </a:solidFill>
-                <a:latin typeface="Arial"/>
-              </a:rPr>
-              <a:t>τ is longer than the acoustic</a:t>
-            </a:r>
-          </a:p>
-          <a:p>
-            <a:pPr algn="ctr">
-              <a:spcAft>
-                <a:spcPts val="0"/>
-              </a:spcAft>
-            </a:pPr>
-            <a:r>
-              <a:rPr sz="1200" b="0" i="0">
-                <a:solidFill>
-                  <a:srgbClr val="E7F0F3"/>
-                </a:solidFill>
-                <a:latin typeface="Arial"/>
-              </a:rPr>
-              <a:t>crossing, so pressure equalises along</a:t>
-            </a:r>
-          </a:p>
-          <a:p>
-            <a:pPr algn="ctr">
-              <a:spcAft>
-                <a:spcPts val="0"/>
-              </a:spcAft>
-            </a:pPr>
-            <a:r>
-              <a:rPr sz="1200" b="0" i="0">
-                <a:solidFill>
-                  <a:srgbClr val="E7F0F3"/>
-                </a:solidFill>
-                <a:latin typeface="Arial"/>
-              </a:rPr>
-              <a:t>the column</a:t>
-            </a:r>
-          </a:p>
-        </p:txBody>
-      </p:sp>
-      <p:sp>
-        <p:nvSpPr>
-          <p:cNvPr id="43" name="C1-E25 text 41" descr="sci-ppt:o041"/>
-          <p:cNvSpPr txBox="1"/>
-          <p:nvPr/>
-        </p:nvSpPr>
-        <p:spPr>
-          <a:xfrm>
-            <a:off x="457200" y="5806440"/>
-            <a:ext cx="11247120" cy="433070"/>
+            <a:off x="4754880" y="1371600"/>
+            <a:ext cx="7040880" cy="433070"/>
           </a:xfrm>
           <a:prstGeom prst="rect">
             <a:avLst/>
@@ -4577,7 +5063,7 @@
                 </a:solidFill>
                 <a:latin typeface="Arial"/>
               </a:rPr>
-              <a:t>Pressure impulse (Pa·s) and acoustic time (s) are different quantities: one measures the load delivered, the other how fast pressure</a:t>
+              <a:t>Small γ: boundary close, strong asymmetry.   Large γ: far boundary, nearly</a:t>
             </a:r>
           </a:p>
           <a:p>
@@ -4593,14 +5079,14 @@
                 </a:solidFill>
                 <a:latin typeface="Arial"/>
               </a:rPr>
-              <a:t>communicates.</a:t>
-            </a:r>
-          </a:p>
-        </p:txBody>
-      </p:sp>
-      <p:sp>
-        <p:nvSpPr>
-          <p:cNvPr id="44" name="C1-E25 text 42" descr="sci-ppt:o042"/>
+              <a:t>spherical.</a:t>
+            </a:r>
+          </a:p>
+        </p:txBody>
+      </p:sp>
+      <p:sp>
+        <p:nvSpPr>
+          <p:cNvPr id="76" name="C1-E25 text 74" descr="sci-ppt:o074"/>
           <p:cNvSpPr txBox="1"/>
           <p:nvPr/>
         </p:nvSpPr>
@@ -4633,7 +5119,7 @@
                 </a:solidFill>
                 <a:latin typeface="Arial"/>
               </a:rPr>
-              <a:t>Π₀ = Δpτ = 0.60 MPa × 0.50 µs = 0.30 Pa·s; U = 3.0 m/s; c = 1500 m/s; L = 100 µm; ν = 10⁻⁶ m²/s.</a:t>
+              <a:t>Definitions of Eq. C1-E25. Positions drawn to show the trend; radii are not to scale.</a:t>
             </a:r>
           </a:p>
         </p:txBody>
